--- a/uvec-dispatch.pptx
+++ b/uvec-dispatch.pptx
@@ -3390,7 +3390,7 @@
           </a:prstGeom>
           <a:extLst>
             <a:ext uri="{C572A759-6A51-4108-AA02-DFA0A04FC94B}">
-              <ma14:wrappingTextBoxFlag xmlns:ma14="http://schemas.microsoft.com/office/mac/drawingml/2011/main" xmlns="" val="0"/>
+              <ma14:wrappingTextBoxFlag xmlns="" xmlns:ma14="http://schemas.microsoft.com/office/mac/drawingml/2011/main" val="0"/>
             </a:ext>
           </a:extLst>
         </p:spPr>
@@ -3545,7 +3545,7 @@
           </a:prstGeom>
           <a:extLst>
             <a:ext uri="{C572A759-6A51-4108-AA02-DFA0A04FC94B}">
-              <ma14:wrappingTextBoxFlag xmlns:ma14="http://schemas.microsoft.com/office/mac/drawingml/2011/main" xmlns="" val="0"/>
+              <ma14:wrappingTextBoxFlag xmlns="" xmlns:ma14="http://schemas.microsoft.com/office/mac/drawingml/2011/main" val="0"/>
             </a:ext>
           </a:extLst>
         </p:spPr>
@@ -3620,7 +3620,7 @@
           </a:prstGeom>
           <a:extLst>
             <a:ext uri="{C572A759-6A51-4108-AA02-DFA0A04FC94B}">
-              <ma14:wrappingTextBoxFlag xmlns:ma14="http://schemas.microsoft.com/office/mac/drawingml/2011/main" xmlns="" val="0"/>
+              <ma14:wrappingTextBoxFlag xmlns="" xmlns:ma14="http://schemas.microsoft.com/office/mac/drawingml/2011/main" val="0"/>
             </a:ext>
           </a:extLst>
         </p:spPr>
@@ -4002,7 +4002,7 @@
                   <a:schemeClr val="bg2"/>
                 </a:solidFill>
               </a:rPr>
-              <a:t>An online dispatcher, a greedy baseline and the CP-SAT hindsight optimum</a:t>
+              <a:t>An online dispatcher, a greedy baseline and an annoyingly complex mid range decision making algorithm</a:t>
             </a:r>
             <a:endParaRPr lang="en-US" sz="1600" dirty="0"/>
           </a:p>
@@ -5530,7 +5530,7 @@
           </a:prstGeom>
           <a:extLst>
             <a:ext uri="{C572A759-6A51-4108-AA02-DFA0A04FC94B}">
-              <ma14:wrappingTextBoxFlag xmlns:ma14="http://schemas.microsoft.com/office/mac/drawingml/2011/main" xmlns="" val="0"/>
+              <ma14:wrappingTextBoxFlag xmlns="" xmlns:ma14="http://schemas.microsoft.com/office/mac/drawingml/2011/main" val="0"/>
             </a:ext>
           </a:extLst>
         </p:spPr>
@@ -5908,7 +5908,7 @@
           </a:prstGeom>
           <a:extLst>
             <a:ext uri="{C572A759-6A51-4108-AA02-DFA0A04FC94B}">
-              <ma14:wrappingTextBoxFlag xmlns:ma14="http://schemas.microsoft.com/office/mac/drawingml/2011/main" xmlns="" val="0"/>
+              <ma14:wrappingTextBoxFlag xmlns="" xmlns:ma14="http://schemas.microsoft.com/office/mac/drawingml/2011/main" val="0"/>
             </a:ext>
           </a:extLst>
         </p:spPr>
@@ -6338,7 +6338,7 @@
           </a:prstGeom>
           <a:extLst>
             <a:ext uri="{C572A759-6A51-4108-AA02-DFA0A04FC94B}">
-              <ma14:wrappingTextBoxFlag xmlns:ma14="http://schemas.microsoft.com/office/mac/drawingml/2011/main" xmlns="" val="0"/>
+              <ma14:wrappingTextBoxFlag xmlns="" xmlns:ma14="http://schemas.microsoft.com/office/mac/drawingml/2011/main" val="0"/>
             </a:ext>
           </a:extLst>
         </p:spPr>
@@ -6452,25 +6452,6 @@
             <a:pPr marL="0" indent="0">
               <a:buNone/>
             </a:pPr>
-            <a:r>
-              <a:rPr lang="en-US" sz="1400" dirty="0">
-                <a:solidFill>
-                  <a:schemeClr val="tx2"/>
-                </a:solidFill>
-                <a:latin typeface="Courier New" pitchFamily="34" charset="0"/>
-                <a:ea typeface="Courier New" pitchFamily="34" charset="-122"/>
-                <a:cs typeface="Courier New" pitchFamily="34" charset="-120"/>
-              </a:rPr>
-              <a:t>python run_checks.py</a:t>
-            </a:r>
-            <a:r>
-              <a:rPr lang="en-US" sz="1400" b="1" dirty="0">
-                <a:solidFill>
-                  <a:schemeClr val="accent5"/>
-                </a:solidFill>
-              </a:rPr>
-              <a:t>  →  8 of 8 checks pass</a:t>
-            </a:r>
             <a:endParaRPr lang="en-US" sz="1400" dirty="0"/>
           </a:p>
         </p:txBody>
@@ -7141,7 +7122,7 @@
           </a:prstGeom>
           <a:extLst>
             <a:ext uri="{C572A759-6A51-4108-AA02-DFA0A04FC94B}">
-              <ma14:wrappingTextBoxFlag xmlns:ma14="http://schemas.microsoft.com/office/mac/drawingml/2011/main" xmlns="" val="0"/>
+              <ma14:wrappingTextBoxFlag xmlns="" xmlns:ma14="http://schemas.microsoft.com/office/mac/drawingml/2011/main" val="0"/>
             </a:ext>
           </a:extLst>
         </p:spPr>
@@ -7847,7 +7828,7 @@
           </a:prstGeom>
           <a:extLst>
             <a:ext uri="{C572A759-6A51-4108-AA02-DFA0A04FC94B}">
-              <ma14:wrappingTextBoxFlag xmlns:ma14="http://schemas.microsoft.com/office/mac/drawingml/2011/main" xmlns="" val="0"/>
+              <ma14:wrappingTextBoxFlag xmlns="" xmlns:ma14="http://schemas.microsoft.com/office/mac/drawingml/2011/main" val="0"/>
             </a:ext>
           </a:extLst>
         </p:spPr>
@@ -11150,7 +11131,7 @@
           </a:prstGeom>
           <a:extLst>
             <a:ext uri="{C572A759-6A51-4108-AA02-DFA0A04FC94B}">
-              <ma14:wrappingTextBoxFlag xmlns:ma14="http://schemas.microsoft.com/office/mac/drawingml/2011/main" xmlns="" val="0"/>
+              <ma14:wrappingTextBoxFlag xmlns="" xmlns:ma14="http://schemas.microsoft.com/office/mac/drawingml/2011/main" val="0"/>
             </a:ext>
           </a:extLst>
         </p:spPr>
@@ -13646,7 +13627,7 @@
           </a:prstGeom>
           <a:extLst>
             <a:ext uri="{C572A759-6A51-4108-AA02-DFA0A04FC94B}">
-              <ma14:wrappingTextBoxFlag xmlns:ma14="http://schemas.microsoft.com/office/mac/drawingml/2011/main" xmlns="" val="0"/>
+              <ma14:wrappingTextBoxFlag xmlns="" xmlns:ma14="http://schemas.microsoft.com/office/mac/drawingml/2011/main" val="0"/>
             </a:ext>
           </a:extLst>
         </p:spPr>
@@ -14590,7 +14571,7 @@
           </a:prstGeom>
           <a:extLst>
             <a:ext uri="{C572A759-6A51-4108-AA02-DFA0A04FC94B}">
-              <ma14:wrappingTextBoxFlag xmlns:ma14="http://schemas.microsoft.com/office/mac/drawingml/2011/main" xmlns="" val="0"/>
+              <ma14:wrappingTextBoxFlag xmlns="" xmlns:ma14="http://schemas.microsoft.com/office/mac/drawingml/2011/main" val="0"/>
             </a:ext>
           </a:extLst>
         </p:spPr>
@@ -16209,7 +16190,7 @@
           </a:prstGeom>
           <a:extLst>
             <a:ext uri="{C572A759-6A51-4108-AA02-DFA0A04FC94B}">
-              <ma14:wrappingTextBoxFlag xmlns:ma14="http://schemas.microsoft.com/office/mac/drawingml/2011/main" xmlns="" val="0"/>
+              <ma14:wrappingTextBoxFlag xmlns="" xmlns:ma14="http://schemas.microsoft.com/office/mac/drawingml/2011/main" val="0"/>
             </a:ext>
           </a:extLst>
         </p:spPr>
@@ -17987,7 +17968,7 @@
           </a:prstGeom>
           <a:extLst>
             <a:ext uri="{C572A759-6A51-4108-AA02-DFA0A04FC94B}">
-              <ma14:wrappingTextBoxFlag xmlns:ma14="http://schemas.microsoft.com/office/mac/drawingml/2011/main" xmlns="" val="0"/>
+              <ma14:wrappingTextBoxFlag xmlns="" xmlns:ma14="http://schemas.microsoft.com/office/mac/drawingml/2011/main" val="0"/>
             </a:ext>
           </a:extLst>
         </p:spPr>
@@ -19339,7 +19320,7 @@
           </a:prstGeom>
           <a:extLst>
             <a:ext uri="{C572A759-6A51-4108-AA02-DFA0A04FC94B}">
-              <ma14:wrappingTextBoxFlag xmlns:ma14="http://schemas.microsoft.com/office/mac/drawingml/2011/main" xmlns="" val="0"/>
+              <ma14:wrappingTextBoxFlag xmlns="" xmlns:ma14="http://schemas.microsoft.com/office/mac/drawingml/2011/main" val="0"/>
             </a:ext>
           </a:extLst>
         </p:spPr>
@@ -23043,7 +23024,7 @@
           </a:prstGeom>
           <a:extLst>
             <a:ext uri="{C572A759-6A51-4108-AA02-DFA0A04FC94B}">
-              <ma14:wrappingTextBoxFlag xmlns:ma14="http://schemas.microsoft.com/office/mac/drawingml/2011/main" xmlns="" val="0"/>
+              <ma14:wrappingTextBoxFlag xmlns="" xmlns:ma14="http://schemas.microsoft.com/office/mac/drawingml/2011/main" val="0"/>
             </a:ext>
           </a:extLst>
         </p:spPr>
@@ -23385,7 +23366,7 @@
           </a:prstGeom>
           <a:extLst>
             <a:ext uri="{C572A759-6A51-4108-AA02-DFA0A04FC94B}">
-              <ma14:wrappingTextBoxFlag xmlns:ma14="http://schemas.microsoft.com/office/mac/drawingml/2011/main" xmlns="" val="0"/>
+              <ma14:wrappingTextBoxFlag xmlns="" xmlns:ma14="http://schemas.microsoft.com/office/mac/drawingml/2011/main" val="0"/>
             </a:ext>
           </a:extLst>
         </p:spPr>
@@ -24091,7 +24072,7 @@
           </a:prstGeom>
           <a:extLst>
             <a:ext uri="{C572A759-6A51-4108-AA02-DFA0A04FC94B}">
-              <ma14:wrappingTextBoxFlag xmlns:ma14="http://schemas.microsoft.com/office/mac/drawingml/2011/main" xmlns="" val="0"/>
+              <ma14:wrappingTextBoxFlag xmlns="" xmlns:ma14="http://schemas.microsoft.com/office/mac/drawingml/2011/main" val="0"/>
             </a:ext>
           </a:extLst>
         </p:spPr>

--- a/uvec-dispatch.pptx
+++ b/uvec-dispatch.pptx
@@ -5,7 +5,7 @@
     <p:sldMasterId id="2147483648" r:id="rId1"/>
   </p:sldMasterIdLst>
   <p:notesMasterIdLst>
-    <p:notesMasterId r:id="rId17"/>
+    <p:notesMasterId r:id="rId16"/>
   </p:notesMasterIdLst>
   <p:sldIdLst>
     <p:sldId id="256" r:id="rId2"/>
@@ -15,14 +15,13 @@
     <p:sldId id="260" r:id="rId6"/>
     <p:sldId id="261" r:id="rId7"/>
     <p:sldId id="262" r:id="rId8"/>
-    <p:sldId id="263" r:id="rId9"/>
-    <p:sldId id="264" r:id="rId10"/>
-    <p:sldId id="265" r:id="rId11"/>
-    <p:sldId id="266" r:id="rId12"/>
-    <p:sldId id="267" r:id="rId13"/>
-    <p:sldId id="268" r:id="rId14"/>
-    <p:sldId id="269" r:id="rId15"/>
-    <p:sldId id="270" r:id="rId16"/>
+    <p:sldId id="264" r:id="rId9"/>
+    <p:sldId id="265" r:id="rId10"/>
+    <p:sldId id="266" r:id="rId11"/>
+    <p:sldId id="267" r:id="rId12"/>
+    <p:sldId id="268" r:id="rId13"/>
+    <p:sldId id="269" r:id="rId14"/>
+    <p:sldId id="270" r:id="rId15"/>
   </p:sldIdLst>
   <p:sldSz cx="9144000" cy="5143500" type="screen16x9"/>
   <p:notesSz cx="5143500" cy="9144000"/>
@@ -138,7 +137,6 @@
             <p14:sldId id="260"/>
             <p14:sldId id="261"/>
             <p14:sldId id="262"/>
-            <p14:sldId id="263"/>
             <p14:sldId id="264"/>
           </p14:sldIdLst>
         </p14:section>
@@ -174,249 +172,6 @@
 </file>
 
 <file path=ppt/charts/chart1.xml><?xml version="1.0" encoding="utf-8"?>
-<c:chartSpace xmlns:c="http://schemas.openxmlformats.org/drawingml/2006/chart" xmlns:a="http://schemas.openxmlformats.org/drawingml/2006/main" xmlns:r="http://schemas.openxmlformats.org/officeDocument/2006/relationships" xmlns:c16r2="http://schemas.microsoft.com/office/drawing/2015/06/chart">
-  <c:date1904 val="0"/>
-  <c:lang val="en-US"/>
-  <c:roundedCorners val="1"/>
-  <c:style val="2"/>
-  <c:chart>
-    <c:title>
-      <c:tx>
-        <c:rich>
-          <a:bodyPr/>
-          <a:lstStyle/>
-          <a:p>
-            <a:pPr>
-              <a:defRPr sz="1400" b="0" i="0" u="none" strike="noStrike">
-                <a:solidFill>
-                  <a:schemeClr val="tx1"/>
-                </a:solidFill>
-                <a:latin typeface="+mn-lt"/>
-              </a:defRPr>
-            </a:pPr>
-            <a:r>
-              <a:rPr lang="en-CA" sz="1400" b="0" i="0" u="none" strike="noStrike">
-                <a:solidFill>
-                  <a:schemeClr val="tx1"/>
-                </a:solidFill>
-                <a:latin typeface="+mn-lt"/>
-              </a:rPr>
-              <a:t>Delay saved vs serving the oldest call first</a:t>
-            </a:r>
-          </a:p>
-        </c:rich>
-      </c:tx>
-      <c:overlay val="0"/>
-    </c:title>
-    <c:autoTitleDeleted val="0"/>
-    <c:plotArea>
-      <c:layout/>
-      <c:barChart>
-        <c:barDir val="bar"/>
-        <c:grouping val="clustered"/>
-        <c:varyColors val="0"/>
-        <c:ser>
-          <c:idx val="0"/>
-          <c:order val="0"/>
-          <c:tx>
-            <c:strRef>
-              <c:f>Sheet1!$B$1</c:f>
-              <c:strCache>
-                <c:ptCount val="1"/>
-                <c:pt idx="0">
-                  <c:v>Delay saved</c:v>
-                </c:pt>
-              </c:strCache>
-            </c:strRef>
-          </c:tx>
-          <c:spPr>
-            <a:solidFill>
-              <a:srgbClr val="D62839"/>
-            </a:solidFill>
-            <a:effectLst/>
-          </c:spPr>
-          <c:invertIfNegative val="0"/>
-          <c:dLbls>
-            <c:numFmt formatCode="0%" sourceLinked="0"/>
-            <c:spPr>
-              <a:noFill/>
-              <a:ln>
-                <a:noFill/>
-              </a:ln>
-              <a:effectLst/>
-            </c:spPr>
-            <c:txPr>
-              <a:bodyPr/>
-              <a:lstStyle/>
-              <a:p>
-                <a:pPr>
-                  <a:defRPr sz="1200" b="0" i="0" u="none" strike="noStrike">
-                    <a:solidFill>
-                      <a:schemeClr val="tx1"/>
-                    </a:solidFill>
-                    <a:latin typeface="+mn-lt"/>
-                  </a:defRPr>
-                </a:pPr>
-                <a:endParaRPr lang="en-US"/>
-              </a:p>
-            </c:txPr>
-            <c:showLegendKey val="0"/>
-            <c:showVal val="1"/>
-            <c:showCatName val="0"/>
-            <c:showSerName val="0"/>
-            <c:showPercent val="0"/>
-            <c:showBubbleSize val="0"/>
-            <c:showLeaderLines val="0"/>
-            <c:extLst>
-              <c:ext xmlns:c15="http://schemas.microsoft.com/office/drawing/2012/chart" uri="{CE6537A1-D6FC-4f65-9D91-7224C49458BB}">
-                <c15:showLeaderLines val="0"/>
-              </c:ext>
-            </c:extLst>
-          </c:dLbls>
-          <c:cat>
-            <c:strRef>
-              <c:f>Sheet1!$A$2:$A$5</c:f>
-              <c:strCache>
-                <c:ptCount val="4"/>
-                <c:pt idx="0">
-                  <c:v>burst (9 calls)</c:v>
-                </c:pt>
-                <c:pt idx="1">
-                  <c:v>rush_hour (12 calls)</c:v>
-                </c:pt>
-                <c:pt idx="2">
-                  <c:v>overload_day (115 calls)</c:v>
-                </c:pt>
-                <c:pt idx="3">
-                  <c:v>backlog_24 (24 calls)</c:v>
-                </c:pt>
-              </c:strCache>
-            </c:strRef>
-          </c:cat>
-          <c:val>
-            <c:numRef>
-              <c:f>Sheet1!$B$2:$B$5</c:f>
-              <c:numCache>
-                <c:formatCode>General</c:formatCode>
-                <c:ptCount val="4"/>
-                <c:pt idx="0">
-                  <c:v>0.12903225806451613</c:v>
-                </c:pt>
-                <c:pt idx="1">
-                  <c:v>0.13259668508287292</c:v>
-                </c:pt>
-                <c:pt idx="2">
-                  <c:v>0.30737263352316457</c:v>
-                </c:pt>
-                <c:pt idx="3">
-                  <c:v>0.47703927492447129</c:v>
-                </c:pt>
-              </c:numCache>
-            </c:numRef>
-          </c:val>
-          <c:extLst>
-            <c:ext xmlns:c16="http://schemas.microsoft.com/office/drawing/2014/chart" uri="{C3380CC4-5D6E-409C-BE32-E72D297353CC}">
-              <c16:uniqueId val="{00000000-AB3D-5747-A7AD-B9B573BC56BB}"/>
-            </c:ext>
-          </c:extLst>
-        </c:ser>
-        <c:dLbls>
-          <c:showLegendKey val="0"/>
-          <c:showVal val="1"/>
-          <c:showCatName val="0"/>
-          <c:showSerName val="0"/>
-          <c:showPercent val="0"/>
-          <c:showBubbleSize val="0"/>
-        </c:dLbls>
-        <c:gapWidth val="55"/>
-        <c:axId val="2094734554"/>
-        <c:axId val="2094734552"/>
-      </c:barChart>
-      <c:catAx>
-        <c:axId val="2094734554"/>
-        <c:scaling>
-          <c:orientation val="minMax"/>
-        </c:scaling>
-        <c:delete val="0"/>
-        <c:axPos val="l"/>
-        <c:numFmt formatCode="General" sourceLinked="1"/>
-        <c:majorTickMark val="out"/>
-        <c:minorTickMark val="none"/>
-        <c:tickLblPos val="nextTo"/>
-        <c:spPr>
-          <a:ln w="12700" cap="flat">
-            <a:solidFill>
-              <a:srgbClr val="888888"/>
-            </a:solidFill>
-            <a:prstDash val="solid"/>
-            <a:round/>
-          </a:ln>
-        </c:spPr>
-        <c:txPr>
-          <a:bodyPr/>
-          <a:lstStyle/>
-          <a:p>
-            <a:pPr>
-              <a:defRPr sz="1200" b="0" i="0" u="none" strike="noStrike">
-                <a:solidFill>
-                  <a:schemeClr val="tx1"/>
-                </a:solidFill>
-                <a:latin typeface="+mn-lt"/>
-              </a:defRPr>
-            </a:pPr>
-            <a:endParaRPr lang="en-US"/>
-          </a:p>
-        </c:txPr>
-        <c:crossAx val="2094734552"/>
-        <c:crosses val="autoZero"/>
-        <c:auto val="1"/>
-        <c:lblAlgn val="ctr"/>
-        <c:lblOffset val="100"/>
-        <c:noMultiLvlLbl val="1"/>
-      </c:catAx>
-      <c:valAx>
-        <c:axId val="2094734552"/>
-        <c:scaling>
-          <c:orientation val="minMax"/>
-          <c:max val="0.6"/>
-          <c:min val="0"/>
-        </c:scaling>
-        <c:delete val="1"/>
-        <c:axPos val="b"/>
-        <c:numFmt formatCode="General" sourceLinked="0"/>
-        <c:majorTickMark val="out"/>
-        <c:minorTickMark val="none"/>
-        <c:tickLblPos val="low"/>
-        <c:crossAx val="2094734554"/>
-        <c:crosses val="autoZero"/>
-        <c:crossBetween val="between"/>
-      </c:valAx>
-      <c:spPr>
-        <a:noFill/>
-        <a:ln>
-          <a:noFill/>
-        </a:ln>
-        <a:effectLst/>
-      </c:spPr>
-    </c:plotArea>
-    <c:plotVisOnly val="1"/>
-    <c:dispBlanksAs val="span"/>
-    <c:showDLblsOverMax val="1"/>
-  </c:chart>
-  <c:spPr>
-    <a:noFill/>
-    <a:ln>
-      <a:noFill/>
-    </a:ln>
-    <a:effectLst/>
-  </c:spPr>
-  <c:externalData r:id="rId1">
-    <c:autoUpdate val="0"/>
-  </c:externalData>
-</c:chartSpace>
-</file>
-
-<file path=ppt/charts/chart2.xml><?xml version="1.0" encoding="utf-8"?>
 <c:chartSpace xmlns:c="http://schemas.openxmlformats.org/drawingml/2006/chart" xmlns:a="http://schemas.openxmlformats.org/drawingml/2006/main" xmlns:r="http://schemas.openxmlformats.org/officeDocument/2006/relationships" xmlns:c16r2="http://schemas.microsoft.com/office/drawing/2015/06/chart">
   <c:date1904 val="0"/>
   <c:lang val="en-US"/>
@@ -941,7 +696,7 @@
 </c:chartSpace>
 </file>
 
-<file path=ppt/charts/chart3.xml><?xml version="1.0" encoding="utf-8"?>
+<file path=ppt/charts/chart2.xml><?xml version="1.0" encoding="utf-8"?>
 <c:chartSpace xmlns:c="http://schemas.openxmlformats.org/drawingml/2006/chart" xmlns:a="http://schemas.openxmlformats.org/drawingml/2006/main" xmlns:r="http://schemas.openxmlformats.org/officeDocument/2006/relationships" xmlns:c16r2="http://schemas.microsoft.com/office/drawing/2015/06/chart">
   <c:date1904 val="0"/>
   <c:lang val="en-US"/>
@@ -1432,7 +1187,7 @@
 </c:chartSpace>
 </file>
 
-<file path=ppt/charts/chart4.xml><?xml version="1.0" encoding="utf-8"?>
+<file path=ppt/charts/chart3.xml><?xml version="1.0" encoding="utf-8"?>
 <c:chartSpace xmlns:c="http://schemas.openxmlformats.org/drawingml/2006/chart" xmlns:a="http://schemas.openxmlformats.org/drawingml/2006/main" xmlns:r="http://schemas.openxmlformats.org/officeDocument/2006/relationships" xmlns:c16r2="http://schemas.microsoft.com/office/drawing/2015/06/chart">
   <c:date1904 val="0"/>
   <c:lang val="en-US"/>
@@ -1951,7 +1706,7 @@
           <a:p>
             <a:r>
               <a:rPr lang="en-US" dirty="0"/>
-              <a:t>~0:50. Now the results. We generated 1,980 days across five suites: mixed days, specific demand patterns, rush hours, a large city with about 8 vehicles, and overloaded days. Average delay per call: greedy 22.6 minutes, ours with return to base 20.7, ours with standby 17.3, which is 23.5% below greedy. Ours was better on 1,709 days and worse on 142. Re-planning alone, with greedy's return-to-base rule, is worth 8%; standby parking is worth the rest.</a:t>
+              <a:t>~0:50. How much is left on the table? On 230 sampled days we compared with CP-SAT's optimum, under its rules: return to base. Greedy is 4 to 19% above it. Our dispatcher under the same rules is 0.6 to 2.1% above, without seeing the future. With standby it's 7 to 19% below that optimum, because parking near demand is worth more than perfect foresight. And if we told our dispatcher the city's true call pattern, it would gain only about 6% more (3 to 9% by suite), so demand estimation is close to its ceiling. If asked: on hindsight_check.py's tiny random days (1 to 25 calls) the per-day average gap is about 4%, because a few minutes on a 30-minute day is a big percentage.</a:t>
             </a:r>
           </a:p>
         </p:txBody>
@@ -2038,7 +1793,7 @@
           <a:p>
             <a:r>
               <a:rPr lang="en-US" dirty="0"/>
-              <a:t>~0:50. How much is left on the table? On 230 sampled days we compared with CP-SAT's optimum, under its rules: return to base. Greedy is 4 to 19% above it. Our dispatcher under the same rules is 0.6 to 2.1% above, without seeing the future. With standby it's 7 to 19% below that optimum, because parking near demand is worth more than perfect foresight. And if we told our dispatcher the city's true call pattern, it would gain only about 6% more (3 to 9% by suite), so demand estimation is close to its ceiling. If asked: on hindsight_check.py's tiny random days (1 to 25 calls) the per-day average gap is about 4%, because a few minutes on a 30-minute day is a big percentage.</a:t>
+              <a:t>~0:50. We also tried ideas that didn't make it, each measured on 1,920 simulated days at its best setting. Holding calls a few minutes to batch them always hurt, more the longer we held them. Keeping a backup vehicle near base hurt. Weighting recent calls, penalising long jobs, smoothing the demand map and re-planning every minute were all within half a percent. Moving to standby more eagerly saved half a percent of delay but cost 11% more driving, so we kept the stricter threshold. The backlog planner is the one that made the cut.</a:t>
             </a:r>
           </a:p>
         </p:txBody>
@@ -2125,7 +1880,7 @@
           <a:p>
             <a:r>
               <a:rPr lang="en-US" dirty="0"/>
-              <a:t>~0:50. We also tried ideas that didn't make it, each measured on 1,920 simulated days at its best setting. Holding calls a few minutes to batch them always hurt, more the longer we held them. Keeping a backup vehicle near base hurt. Weighting recent calls, penalising long jobs, smoothing the demand map and re-planning every minute were all within half a percent. Moving to standby more eagerly saved half a percent of delay but cost 11% more driving, so we kept the stricter threshold. The backlog planner is the one that made the cut.</a:t>
+              <a:t>~0:55. How do we know the schedules are right? run_checks.py runs eight checks, all passing. An independent validator replays every schedule and recomputes the delay. Tricky cases have hand-computed totals, and bad input gets a clear error naming the line. The no-peeking test cuts every call from some time T on and checks that nothing the dispatcher did before T changes. Our no-replan mode reproduces the hindsight greedy exactly, and base mode never beats CP-SAT's proven optimum. On the right is the web replay: standby and return-to-base side by side, minute by minute. Good moment for a 30-second demo if time allows.</a:t>
             </a:r>
           </a:p>
         </p:txBody>
@@ -2212,7 +1967,7 @@
           <a:p>
             <a:r>
               <a:rPr lang="en-US" dirty="0"/>
-              <a:t>~0:55. How do we know the schedules are right? run_checks.py runs eight checks, all passing. An independent validator replays every schedule and recomputes the delay. Tricky cases have hand-computed totals, and bad input gets a clear error naming the line. The no-peeking test cuts every call from some time T on and checks that nothing the dispatcher did before T changes. Our no-replan mode reproduces the hindsight greedy exactly, and base mode never beats CP-SAT's proven optimum. On the right is the web replay: standby and return-to-base side by side, minute by minute. Good moment for a 30-second demo if time allows.</a:t>
+              <a:t>~0:30. Three takeaways. Re-planning the queue beats committing early. Waiting near demand beats going home. And we're within about 2% of perfect hindsight under the same rules, without seeing the future. Thanks, happy to take questions or show the replay.</a:t>
             </a:r>
           </a:p>
         </p:txBody>
@@ -2299,7 +2054,7 @@
           <a:p>
             <a:r>
               <a:rPr lang="en-US" dirty="0"/>
-              <a:t>~0:30. Three takeaways. Re-planning the queue beats committing early. Waiting near demand beats going home. And we're within about 2% of perfect hindsight under the same rules, without seeing the future. Thanks, happy to take questions or show the replay.</a:t>
+              <a:t>Backup slide for questions. Totals from running each solver on inputs/*.txt. single_vehicle shows re-planning's effect most: one vehicle, so the queue order is everything (615 vs 462). typical_day shows standby beating even the hindsight optimum under return-to-base rules.</a:t>
             </a:r>
           </a:p>
         </p:txBody>
@@ -2322,93 +2077,6 @@
             <a:fld id="{F7021451-1387-4CA6-816F-3879F97B5CBC}" type="slidenum">
               <a:rPr lang="en-US"/>
               <a:t>14</a:t>
-            </a:fld>
-            <a:endParaRPr lang="en-US"/>
-          </a:p>
-        </p:txBody>
-      </p:sp>
-    </p:spTree>
-    <p:extLst>
-      <p:ext uri="{BB962C8B-B14F-4D97-AF65-F5344CB8AC3E}">
-        <p14:creationId xmlns:p14="http://schemas.microsoft.com/office/powerpoint/2010/main" val="1024086991"/>
-      </p:ext>
-    </p:extLst>
-  </p:cSld>
-  <p:clrMapOvr>
-    <a:masterClrMapping/>
-  </p:clrMapOvr>
-</p:notes>
-</file>
-
-<file path=ppt/notesSlides/notesSlide15.xml><?xml version="1.0" encoding="utf-8"?>
-<p:notes xmlns:a="http://schemas.openxmlformats.org/drawingml/2006/main" xmlns:r="http://schemas.openxmlformats.org/officeDocument/2006/relationships" xmlns:p="http://schemas.openxmlformats.org/presentationml/2006/main">
-  <p:cSld>
-    <p:spTree>
-      <p:nvGrpSpPr>
-        <p:cNvPr id="1" name=""/>
-        <p:cNvGrpSpPr/>
-        <p:nvPr/>
-      </p:nvGrpSpPr>
-      <p:grpSpPr>
-        <a:xfrm>
-          <a:off x="0" y="0"/>
-          <a:ext cx="0" cy="0"/>
-          <a:chOff x="0" y="0"/>
-          <a:chExt cx="0" cy="0"/>
-        </a:xfrm>
-      </p:grpSpPr>
-      <p:sp>
-        <p:nvSpPr>
-          <p:cNvPr id="2" name="Slide Image Placeholder 1"/>
-          <p:cNvSpPr>
-            <a:spLocks noGrp="1" noRot="1" noChangeAspect="1"/>
-          </p:cNvSpPr>
-          <p:nvPr>
-            <p:ph type="sldImg"/>
-          </p:nvPr>
-        </p:nvSpPr>
-        <p:spPr/>
-      </p:sp>
-      <p:sp>
-        <p:nvSpPr>
-          <p:cNvPr id="3" name="Notes Placeholder 2"/>
-          <p:cNvSpPr>
-            <a:spLocks noGrp="1"/>
-          </p:cNvSpPr>
-          <p:nvPr>
-            <p:ph type="body" idx="1"/>
-          </p:nvPr>
-        </p:nvSpPr>
-        <p:spPr/>
-        <p:txBody>
-          <a:bodyPr/>
-          <a:lstStyle/>
-          <a:p>
-            <a:r>
-              <a:rPr lang="en-US" dirty="0"/>
-              <a:t>Backup slide for questions. Totals from running each solver on inputs/*.txt. single_vehicle shows re-planning's effect most: one vehicle, so the queue order is everything (615 vs 462). typical_day shows standby beating even the hindsight optimum under return-to-base rules.</a:t>
-            </a:r>
-          </a:p>
-        </p:txBody>
-      </p:sp>
-      <p:sp>
-        <p:nvSpPr>
-          <p:cNvPr id="4" name="Slide Number Placeholder 3"/>
-          <p:cNvSpPr>
-            <a:spLocks noGrp="1"/>
-          </p:cNvSpPr>
-          <p:nvPr>
-            <p:ph type="sldNum" sz="quarter" idx="10"/>
-          </p:nvPr>
-        </p:nvSpPr>
-        <p:spPr/>
-        <p:txBody>
-          <a:bodyPr/>
-          <a:lstStyle/>
-          <a:p>
-            <a:fld id="{F7021451-1387-4CA6-816F-3879F97B5CBC}" type="slidenum">
-              <a:rPr lang="en-US"/>
-              <a:t>15</a:t>
             </a:fld>
             <a:endParaRPr lang="en-US"/>
           </a:p>
@@ -2995,7 +2663,7 @@
           <a:p>
             <a:r>
               <a:rPr lang="en-US" dirty="0"/>
-              <a:t>~0:50. Our latest improvement handles backlogs: more calls waiting than vehicles to take them. The old rule served the oldest call first. The planner instead picks the split and order with the least total delay, exactly up to 12 calls. So the oldest call isn't starved, each call counts 1 plus the hours it has waited. On our stress inputs it cuts delay by 13 to 48%; on the burst test it hits CP-SAT's proven optimum; on 200 simulated rush-hour days it improved 14 and made none worse.</a:t>
+              <a:t>~0:55. CP-SAT is the constraint solver in Google OR-Tools. We give it the whole day: each vehicle's route is a circuit through its calls, with exact timing, including waiting for a call to come in and the vehicle drifting back toward base between jobs. On small days it proves the answer optimal; on larger days it gives its best schedule and a lower bound. We checked it against brute force: on 40 small random days it matched trying every possible schedule every time, and greedy was not optimal on 19 of those 40.</a:t>
             </a:r>
           </a:p>
         </p:txBody>
@@ -3082,7 +2750,7 @@
           <a:p>
             <a:r>
               <a:rPr lang="en-US" dirty="0"/>
-              <a:t>~0:55. CP-SAT is the constraint solver in Google OR-Tools. We give it the whole day: each vehicle's route is a circuit through its calls, with exact timing, including waiting for a call to come in and the vehicle drifting back toward base between jobs. On small days it proves the answer optimal; on larger days it gives its best schedule and a lower bound. We checked it against brute force: on 40 small random days it matched trying every possible schedule every time, and greedy was not optimal on 19 of those 40.</a:t>
+              <a:t>~0:50. Now the results. We generated 1,980 days across five suites: mixed days, specific demand patterns, rush hours, a large city with about 8 vehicles, and overloaded days. Average delay per call: greedy 22.6 minutes, ours with return to base 20.7, ours with standby 17.3, which is 23.5% below greedy. Ours was better on 1,709 days and worse on 142. Re-planning alone, with greedy's return-to-base rule, is worth 8%; standby parking is worth the rest.</a:t>
             </a:r>
           </a:p>
         </p:txBody>
@@ -5187,384 +4855,6 @@
 
 <file path=ppt/slides/slide10.xml><?xml version="1.0" encoding="utf-8"?>
 <p:sld xmlns:a="http://schemas.openxmlformats.org/drawingml/2006/main" xmlns:r="http://schemas.openxmlformats.org/officeDocument/2006/relationships" xmlns:p="http://schemas.openxmlformats.org/presentationml/2006/main">
-  <p:cSld name="Slide 10">
-    <p:spTree>
-      <p:nvGrpSpPr>
-        <p:cNvPr id="1" name=""/>
-        <p:cNvGrpSpPr/>
-        <p:nvPr/>
-      </p:nvGrpSpPr>
-      <p:grpSpPr>
-        <a:xfrm>
-          <a:off x="0" y="0"/>
-          <a:ext cx="0" cy="0"/>
-          <a:chOff x="0" y="0"/>
-          <a:chExt cx="0" cy="0"/>
-        </a:xfrm>
-      </p:grpSpPr>
-      <p:sp>
-        <p:nvSpPr>
-          <p:cNvPr id="2" name="Text 0"/>
-          <p:cNvSpPr>
-            <a:spLocks noGrp="1"/>
-          </p:cNvSpPr>
-          <p:nvPr>
-            <p:ph type="title" idx="100" hasCustomPrompt="1"/>
-          </p:nvPr>
-        </p:nvSpPr>
-        <p:spPr>
-          <a:xfrm>
-            <a:off x="457200" y="274320"/>
-            <a:ext cx="8229600" cy="640080"/>
-          </a:xfrm>
-          <a:prstGeom prst="rect">
-            <a:avLst/>
-          </a:prstGeom>
-          <a:noFill/>
-          <a:ln/>
-        </p:spPr>
-        <p:txBody>
-          <a:bodyPr wrap="square" lIns="0" tIns="0" rIns="0" bIns="0" rtlCol="0" anchor="ctr"/>
-          <a:lstStyle/>
-          <a:p>
-            <a:pPr marL="0" indent="0" algn="l">
-              <a:buNone/>
-            </a:pPr>
-            <a:r>
-              <a:rPr lang="en-US" sz="3600" b="1" dirty="0">
-                <a:solidFill>
-                  <a:schemeClr val="tx2"/>
-                </a:solidFill>
-              </a:rPr>
-              <a:t>1,980 simulated days</a:t>
-            </a:r>
-            <a:endParaRPr lang="en-US" sz="3600" dirty="0"/>
-          </a:p>
-        </p:txBody>
-      </p:sp>
-      <p:graphicFrame>
-        <p:nvGraphicFramePr>
-          <p:cNvPr id="3" name="suites chart"/>
-          <p:cNvGraphicFramePr/>
-          <p:nvPr/>
-        </p:nvGraphicFramePr>
-        <p:xfrm>
-          <a:off x="457200" y="1051560"/>
-          <a:ext cx="5669280" cy="3337560"/>
-        </p:xfrm>
-        <a:graphic>
-          <a:graphicData uri="http://schemas.openxmlformats.org/drawingml/2006/chart">
-            <c:chart xmlns:c="http://schemas.openxmlformats.org/drawingml/2006/chart" xmlns:r="http://schemas.openxmlformats.org/officeDocument/2006/relationships" r:id="rId3"/>
-          </a:graphicData>
-        </a:graphic>
-      </p:graphicFrame>
-      <p:sp>
-        <p:nvSpPr>
-          <p:cNvPr id="4" name="Text 1"/>
-          <p:cNvSpPr txBox="1"/>
-          <p:nvPr/>
-        </p:nvSpPr>
-        <p:spPr>
-          <a:xfrm>
-            <a:off x="457200" y="4407408"/>
-            <a:ext cx="5669280" cy="274320"/>
-          </a:xfrm>
-          <a:prstGeom prst="rect">
-            <a:avLst/>
-          </a:prstGeom>
-          <a:noFill/>
-          <a:ln/>
-        </p:spPr>
-        <p:txBody>
-          <a:bodyPr wrap="square" lIns="0" tIns="0" rIns="0" bIns="0" rtlCol="0" anchor="t"/>
-          <a:lstStyle/>
-          <a:p>
-            <a:pPr marL="0" indent="0">
-              <a:buNone/>
-            </a:pPr>
-            <a:r>
-              <a:rPr lang="en-US" sz="1100" dirty="0">
-                <a:solidFill>
-                  <a:schemeClr val="accent6"/>
-                </a:solidFill>
-              </a:rPr>
-              <a:t>Days per suite: 1,200 · 400 · 200 · 120 · 60. Overloaded days average 132 calls for 8 vehicles.</a:t>
-            </a:r>
-            <a:endParaRPr lang="en-US" sz="1100" dirty="0"/>
-          </a:p>
-        </p:txBody>
-      </p:sp>
-      <p:sp>
-        <p:nvSpPr>
-          <p:cNvPr id="5" name="36 value"/>
-          <p:cNvSpPr txBox="1"/>
-          <p:nvPr/>
-        </p:nvSpPr>
-        <p:spPr>
-          <a:xfrm>
-            <a:off x="6400800" y="1188720"/>
-            <a:ext cx="2286000" cy="502920"/>
-          </a:xfrm>
-          <a:prstGeom prst="rect">
-            <a:avLst/>
-          </a:prstGeom>
-          <a:noFill/>
-          <a:ln/>
-        </p:spPr>
-        <p:txBody>
-          <a:bodyPr wrap="square" lIns="0" tIns="0" rIns="0" bIns="0" rtlCol="0" anchor="b"/>
-          <a:lstStyle/>
-          <a:p>
-            <a:pPr marL="0" indent="0">
-              <a:buNone/>
-            </a:pPr>
-            <a:r>
-              <a:rPr lang="en-US" sz="3200" b="1" dirty="0">
-                <a:solidFill>
-                  <a:schemeClr val="accent1"/>
-                </a:solidFill>
-              </a:rPr>
-              <a:t>−23.5%</a:t>
-            </a:r>
-            <a:endParaRPr lang="en-US" sz="3200" dirty="0"/>
-          </a:p>
-        </p:txBody>
-      </p:sp>
-      <p:sp>
-        <p:nvSpPr>
-          <p:cNvPr id="6" name="36 label"/>
-          <p:cNvSpPr txBox="1"/>
-          <p:nvPr/>
-        </p:nvSpPr>
-        <p:spPr>
-          <a:xfrm>
-            <a:off x="6400800" y="1755648"/>
-            <a:ext cx="2286000" cy="566928"/>
-          </a:xfrm>
-          <a:prstGeom prst="rect">
-            <a:avLst/>
-          </a:prstGeom>
-          <a:noFill/>
-          <a:ln/>
-        </p:spPr>
-        <p:txBody>
-          <a:bodyPr wrap="square" lIns="0" tIns="0" rIns="0" bIns="0" rtlCol="0" anchor="t"/>
-          <a:lstStyle/>
-          <a:p>
-            <a:pPr marL="0" indent="0">
-              <a:buNone/>
-            </a:pPr>
-            <a:r>
-              <a:rPr lang="en-US" sz="1400" dirty="0">
-                <a:solidFill>
-                  <a:schemeClr val="tx1"/>
-                </a:solidFill>
-              </a:rPr>
-              <a:t>average delay per call vs greedy: 22.6 → 17.3 min</a:t>
-            </a:r>
-            <a:endParaRPr lang="en-US" sz="1400" dirty="0"/>
-          </a:p>
-        </p:txBody>
-      </p:sp>
-      <p:sp>
-        <p:nvSpPr>
-          <p:cNvPr id="7" name="32 value"/>
-          <p:cNvSpPr txBox="1"/>
-          <p:nvPr/>
-        </p:nvSpPr>
-        <p:spPr>
-          <a:xfrm>
-            <a:off x="6400800" y="2423160"/>
-            <a:ext cx="2286000" cy="502920"/>
-          </a:xfrm>
-          <a:prstGeom prst="rect">
-            <a:avLst/>
-          </a:prstGeom>
-          <a:noFill/>
-          <a:ln/>
-        </p:spPr>
-        <p:txBody>
-          <a:bodyPr wrap="square" lIns="0" tIns="0" rIns="0" bIns="0" rtlCol="0" anchor="b"/>
-          <a:lstStyle/>
-          <a:p>
-            <a:pPr marL="0" indent="0">
-              <a:buNone/>
-            </a:pPr>
-            <a:r>
-              <a:rPr lang="en-US" sz="3200" b="1" dirty="0">
-                <a:solidFill>
-                  <a:schemeClr val="tx2"/>
-                </a:solidFill>
-              </a:rPr>
-              <a:t>1,709</a:t>
-            </a:r>
-            <a:endParaRPr lang="en-US" sz="3200" dirty="0"/>
-          </a:p>
-        </p:txBody>
-      </p:sp>
-      <p:sp>
-        <p:nvSpPr>
-          <p:cNvPr id="8" name="32 label"/>
-          <p:cNvSpPr txBox="1"/>
-          <p:nvPr/>
-        </p:nvSpPr>
-        <p:spPr>
-          <a:xfrm>
-            <a:off x="6400800" y="2990088"/>
-            <a:ext cx="2286000" cy="566928"/>
-          </a:xfrm>
-          <a:prstGeom prst="rect">
-            <a:avLst/>
-          </a:prstGeom>
-          <a:noFill/>
-          <a:ln/>
-        </p:spPr>
-        <p:txBody>
-          <a:bodyPr wrap="square" lIns="0" tIns="0" rIns="0" bIns="0" rtlCol="0" anchor="t"/>
-          <a:lstStyle/>
-          <a:p>
-            <a:pPr marL="0" indent="0">
-              <a:buNone/>
-            </a:pPr>
-            <a:r>
-              <a:rPr lang="en-US" sz="1400" dirty="0">
-                <a:solidFill>
-                  <a:schemeClr val="tx1"/>
-                </a:solidFill>
-              </a:rPr>
-              <a:t>days better than greedy; 142 worse, the rest tied</a:t>
-            </a:r>
-            <a:endParaRPr lang="en-US" sz="1400" dirty="0"/>
-          </a:p>
-        </p:txBody>
-      </p:sp>
-      <p:sp>
-        <p:nvSpPr>
-          <p:cNvPr id="9" name="24 value"/>
-          <p:cNvSpPr txBox="1"/>
-          <p:nvPr/>
-        </p:nvSpPr>
-        <p:spPr>
-          <a:xfrm>
-            <a:off x="6400800" y="3657600"/>
-            <a:ext cx="2286000" cy="502920"/>
-          </a:xfrm>
-          <a:prstGeom prst="rect">
-            <a:avLst/>
-          </a:prstGeom>
-          <a:noFill/>
-          <a:ln/>
-        </p:spPr>
-        <p:txBody>
-          <a:bodyPr wrap="square" lIns="0" tIns="0" rIns="0" bIns="0" rtlCol="0" anchor="b"/>
-          <a:lstStyle/>
-          <a:p>
-            <a:pPr marL="0" indent="0">
-              <a:buNone/>
-            </a:pPr>
-            <a:r>
-              <a:rPr lang="en-US" sz="3200" b="1" dirty="0">
-                <a:solidFill>
-                  <a:schemeClr val="tx2"/>
-                </a:solidFill>
-              </a:rPr>
-              <a:t>−8.2%</a:t>
-            </a:r>
-            <a:endParaRPr lang="en-US" sz="3200" dirty="0"/>
-          </a:p>
-        </p:txBody>
-      </p:sp>
-      <p:sp>
-        <p:nvSpPr>
-          <p:cNvPr id="10" name="24 label"/>
-          <p:cNvSpPr txBox="1"/>
-          <p:nvPr/>
-        </p:nvSpPr>
-        <p:spPr>
-          <a:xfrm>
-            <a:off x="6400800" y="4224528"/>
-            <a:ext cx="2286000" cy="566928"/>
-          </a:xfrm>
-          <a:prstGeom prst="rect">
-            <a:avLst/>
-          </a:prstGeom>
-          <a:noFill/>
-          <a:ln/>
-        </p:spPr>
-        <p:txBody>
-          <a:bodyPr wrap="square" lIns="0" tIns="0" rIns="0" bIns="0" rtlCol="0" anchor="t"/>
-          <a:lstStyle/>
-          <a:p>
-            <a:pPr marL="0" indent="0">
-              <a:buNone/>
-            </a:pPr>
-            <a:r>
-              <a:rPr lang="en-US" sz="1400" dirty="0">
-                <a:solidFill>
-                  <a:schemeClr val="tx1"/>
-                </a:solidFill>
-              </a:rPr>
-              <a:t>from re-planning alone, with the same return-to-base rule</a:t>
-            </a:r>
-            <a:endParaRPr lang="en-US" sz="1400" dirty="0"/>
-          </a:p>
-        </p:txBody>
-      </p:sp>
-      <p:sp>
-        <p:nvSpPr>
-          <p:cNvPr id="25" name="Slide Number Placeholder 0"/>
-          <p:cNvSpPr>
-            <a:spLocks noGrp="1"/>
-          </p:cNvSpPr>
-          <p:nvPr>
-            <p:ph type="sldNum" sz="quarter" idx="4294967295"/>
-          </p:nvPr>
-        </p:nvSpPr>
-        <p:spPr>
-          <a:xfrm>
-            <a:off x="8138160" y="4754880"/>
-            <a:ext cx="548640" cy="228600"/>
-          </a:xfrm>
-          <a:prstGeom prst="rect">
-            <a:avLst/>
-          </a:prstGeom>
-          <a:extLst>
-            <a:ext uri="{C572A759-6A51-4108-AA02-DFA0A04FC94B}">
-              <ma14:wrappingTextBoxFlag xmlns="" xmlns:ma14="http://schemas.microsoft.com/office/mac/drawingml/2011/main" val="0"/>
-            </a:ext>
-          </a:extLst>
-        </p:spPr>
-        <p:txBody>
-          <a:bodyPr lIns="0" tIns="0" rIns="0" bIns="0"/>
-          <a:lstStyle>
-            <a:lvl1pPr>
-              <a:defRPr sz="1000">
-                <a:solidFill>
-                  <a:schemeClr val="accent6"/>
-                </a:solidFill>
-              </a:defRPr>
-            </a:lvl1pPr>
-          </a:lstStyle>
-          <a:p>
-            <a:pPr algn="r"/>
-            <a:fld id="{F7021451-1387-4CA6-816F-3879F97B5CBC}" type="slidenum">
-              <a:rPr lang="en-US" b="0"/>
-              <a:t>10</a:t>
-            </a:fld>
-            <a:endParaRPr lang="en-US"/>
-          </a:p>
-        </p:txBody>
-      </p:sp>
-    </p:spTree>
-  </p:cSld>
-  <p:clrMapOvr>
-    <a:masterClrMapping/>
-  </p:clrMapOvr>
-</p:sld>
-</file>
-
-<file path=ppt/slides/slide11.xml><?xml version="1.0" encoding="utf-8"?>
-<p:sld xmlns:a="http://schemas.openxmlformats.org/drawingml/2006/main" xmlns:r="http://schemas.openxmlformats.org/officeDocument/2006/relationships" xmlns:p="http://schemas.openxmlformats.org/presentationml/2006/main">
   <p:cSld name="Slide 11">
     <p:spTree>
       <p:nvGrpSpPr>
@@ -5927,7 +5217,7 @@
             <a:pPr algn="r"/>
             <a:fld id="{F7021451-1387-4CA6-816F-3879F97B5CBC}" type="slidenum">
               <a:rPr lang="en-US" b="0"/>
-              <a:t>11</a:t>
+              <a:t>10</a:t>
             </a:fld>
             <a:endParaRPr lang="en-US"/>
           </a:p>
@@ -5941,7 +5231,7 @@
 </p:sld>
 </file>
 
-<file path=ppt/slides/slide12.xml><?xml version="1.0" encoding="utf-8"?>
+<file path=ppt/slides/slide11.xml><?xml version="1.0" encoding="utf-8"?>
 <p:sld xmlns:a="http://schemas.openxmlformats.org/drawingml/2006/main" xmlns:r="http://schemas.openxmlformats.org/officeDocument/2006/relationships" xmlns:p="http://schemas.openxmlformats.org/presentationml/2006/main">
   <p:cSld name="Slide 12">
     <p:spTree>
@@ -6357,7 +5647,7 @@
             <a:pPr algn="r"/>
             <a:fld id="{F7021451-1387-4CA6-816F-3879F97B5CBC}" type="slidenum">
               <a:rPr lang="en-US" b="0"/>
-              <a:t>12</a:t>
+              <a:t>11</a:t>
             </a:fld>
             <a:endParaRPr lang="en-US"/>
           </a:p>
@@ -6371,7 +5661,7 @@
 </p:sld>
 </file>
 
-<file path=ppt/slides/slide13.xml><?xml version="1.0" encoding="utf-8"?>
+<file path=ppt/slides/slide12.xml><?xml version="1.0" encoding="utf-8"?>
 <p:sld xmlns:a="http://schemas.openxmlformats.org/drawingml/2006/main" xmlns:r="http://schemas.openxmlformats.org/officeDocument/2006/relationships" xmlns:p="http://schemas.openxmlformats.org/presentationml/2006/main">
   <p:cSld name="Slide 13">
     <p:spTree>
@@ -7141,7 +6431,7 @@
             <a:pPr algn="r"/>
             <a:fld id="{F7021451-1387-4CA6-816F-3879F97B5CBC}" type="slidenum">
               <a:rPr lang="en-US" b="0"/>
-              <a:t>13</a:t>
+              <a:t>12</a:t>
             </a:fld>
             <a:endParaRPr lang="en-US"/>
           </a:p>
@@ -7155,7 +6445,7 @@
 </p:sld>
 </file>
 
-<file path=ppt/slides/slide14.xml><?xml version="1.0" encoding="utf-8"?>
+<file path=ppt/slides/slide13.xml><?xml version="1.0" encoding="utf-8"?>
 <p:sld xmlns:a="http://schemas.openxmlformats.org/drawingml/2006/main" xmlns:r="http://schemas.openxmlformats.org/officeDocument/2006/relationships" xmlns:p="http://schemas.openxmlformats.org/presentationml/2006/main">
   <p:cSld name="Slide 14">
     <p:spTree>
@@ -7847,7 +7137,7 @@
             <a:pPr algn="r"/>
             <a:fld id="{F7021451-1387-4CA6-816F-3879F97B5CBC}" type="slidenum">
               <a:rPr lang="en-US" b="0"/>
-              <a:t>14</a:t>
+              <a:t>13</a:t>
             </a:fld>
             <a:endParaRPr lang="en-US"/>
           </a:p>
@@ -7861,7 +7151,7 @@
 </p:sld>
 </file>
 
-<file path=ppt/slides/slide15.xml><?xml version="1.0" encoding="utf-8"?>
+<file path=ppt/slides/slide14.xml><?xml version="1.0" encoding="utf-8"?>
 <p:sld xmlns:a="http://schemas.openxmlformats.org/drawingml/2006/main" xmlns:r="http://schemas.openxmlformats.org/officeDocument/2006/relationships" xmlns:p="http://schemas.openxmlformats.org/presentationml/2006/main">
   <p:cSld name="Slide 15">
     <p:spTree>
@@ -11150,7 +10440,7 @@
             <a:pPr algn="r"/>
             <a:fld id="{F7021451-1387-4CA6-816F-3879F97B5CBC}" type="slidenum">
               <a:rPr lang="en-US" b="0"/>
-              <a:t>15</a:t>
+              <a:t>14</a:t>
             </a:fld>
             <a:endParaRPr lang="en-US"/>
           </a:p>
@@ -23059,348 +22349,6 @@
 
 <file path=ppt/slides/slide8.xml><?xml version="1.0" encoding="utf-8"?>
 <p:sld xmlns:a="http://schemas.openxmlformats.org/drawingml/2006/main" xmlns:r="http://schemas.openxmlformats.org/officeDocument/2006/relationships" xmlns:p="http://schemas.openxmlformats.org/presentationml/2006/main">
-  <p:cSld name="Slide 8">
-    <p:spTree>
-      <p:nvGrpSpPr>
-        <p:cNvPr id="1" name=""/>
-        <p:cNvGrpSpPr/>
-        <p:nvPr/>
-      </p:nvGrpSpPr>
-      <p:grpSpPr>
-        <a:xfrm>
-          <a:off x="0" y="0"/>
-          <a:ext cx="0" cy="0"/>
-          <a:chOff x="0" y="0"/>
-          <a:chExt cx="0" cy="0"/>
-        </a:xfrm>
-      </p:grpSpPr>
-      <p:sp>
-        <p:nvSpPr>
-          <p:cNvPr id="2" name="Text 0"/>
-          <p:cNvSpPr>
-            <a:spLocks noGrp="1"/>
-          </p:cNvSpPr>
-          <p:nvPr>
-            <p:ph type="title" idx="100" hasCustomPrompt="1"/>
-          </p:nvPr>
-        </p:nvSpPr>
-        <p:spPr>
-          <a:xfrm>
-            <a:off x="457200" y="274320"/>
-            <a:ext cx="8229600" cy="640080"/>
-          </a:xfrm>
-          <a:prstGeom prst="rect">
-            <a:avLst/>
-          </a:prstGeom>
-          <a:noFill/>
-          <a:ln/>
-        </p:spPr>
-        <p:txBody>
-          <a:bodyPr wrap="square" lIns="0" tIns="0" rIns="0" bIns="0" rtlCol="0" anchor="ctr"/>
-          <a:lstStyle/>
-          <a:p>
-            <a:pPr marL="0" indent="0" algn="l">
-              <a:buNone/>
-            </a:pPr>
-            <a:r>
-              <a:rPr lang="en-US" sz="3600" b="1" dirty="0">
-                <a:solidFill>
-                  <a:schemeClr val="tx2"/>
-                </a:solidFill>
-              </a:rPr>
-              <a:t>When calls pile up</a:t>
-            </a:r>
-            <a:endParaRPr lang="en-US" sz="3600" dirty="0"/>
-          </a:p>
-        </p:txBody>
-      </p:sp>
-      <p:graphicFrame>
-        <p:nvGraphicFramePr>
-          <p:cNvPr id="3" name="backlog chart"/>
-          <p:cNvGraphicFramePr/>
-          <p:nvPr/>
-        </p:nvGraphicFramePr>
-        <p:xfrm>
-          <a:off x="457200" y="1051560"/>
-          <a:ext cx="4846320" cy="3474720"/>
-        </p:xfrm>
-        <a:graphic>
-          <a:graphicData uri="http://schemas.openxmlformats.org/drawingml/2006/chart">
-            <c:chart xmlns:c="http://schemas.openxmlformats.org/drawingml/2006/chart" xmlns:r="http://schemas.openxmlformats.org/officeDocument/2006/relationships" r:id="rId3"/>
-          </a:graphicData>
-        </a:graphic>
-      </p:graphicFrame>
-      <p:sp>
-        <p:nvSpPr>
-          <p:cNvPr id="4" name="28 value"/>
-          <p:cNvSpPr txBox="1"/>
-          <p:nvPr/>
-        </p:nvSpPr>
-        <p:spPr>
-          <a:xfrm>
-            <a:off x="5577840" y="1051560"/>
-            <a:ext cx="3108960" cy="502920"/>
-          </a:xfrm>
-          <a:prstGeom prst="rect">
-            <a:avLst/>
-          </a:prstGeom>
-          <a:noFill/>
-          <a:ln/>
-        </p:spPr>
-        <p:txBody>
-          <a:bodyPr wrap="square" lIns="0" tIns="0" rIns="0" bIns="0" rtlCol="0" anchor="b"/>
-          <a:lstStyle/>
-          <a:p>
-            <a:pPr marL="0" indent="0">
-              <a:buNone/>
-            </a:pPr>
-            <a:r>
-              <a:rPr lang="en-US" sz="3200" b="1" dirty="0">
-                <a:solidFill>
-                  <a:schemeClr val="accent1"/>
-                </a:solidFill>
-              </a:rPr>
-              <a:t>243 min</a:t>
-            </a:r>
-            <a:endParaRPr lang="en-US" sz="3200" dirty="0"/>
-          </a:p>
-        </p:txBody>
-      </p:sp>
-      <p:sp>
-        <p:nvSpPr>
-          <p:cNvPr id="5" name="28 label"/>
-          <p:cNvSpPr txBox="1"/>
-          <p:nvPr/>
-        </p:nvSpPr>
-        <p:spPr>
-          <a:xfrm>
-            <a:off x="5577840" y="1618488"/>
-            <a:ext cx="3108960" cy="566928"/>
-          </a:xfrm>
-          <a:prstGeom prst="rect">
-            <a:avLst/>
-          </a:prstGeom>
-          <a:noFill/>
-          <a:ln/>
-        </p:spPr>
-        <p:txBody>
-          <a:bodyPr wrap="square" lIns="0" tIns="0" rIns="0" bIns="0" rtlCol="0" anchor="t"/>
-          <a:lstStyle/>
-          <a:p>
-            <a:pPr marL="0" indent="0">
-              <a:buNone/>
-            </a:pPr>
-            <a:r>
-              <a:rPr lang="en-US" sz="1400" dirty="0">
-                <a:solidFill>
-                  <a:schemeClr val="tx1"/>
-                </a:solidFill>
-              </a:rPr>
-              <a:t>on burst: CP-SAT's proven optimum (oldest first: 279)</a:t>
-            </a:r>
-            <a:endParaRPr lang="en-US" sz="1400" dirty="0"/>
-          </a:p>
-        </p:txBody>
-      </p:sp>
-      <p:sp>
-        <p:nvSpPr>
-          <p:cNvPr id="6" name="20 value"/>
-          <p:cNvSpPr txBox="1"/>
-          <p:nvPr/>
-        </p:nvSpPr>
-        <p:spPr>
-          <a:xfrm>
-            <a:off x="5577840" y="2240280"/>
-            <a:ext cx="3108960" cy="502920"/>
-          </a:xfrm>
-          <a:prstGeom prst="rect">
-            <a:avLst/>
-          </a:prstGeom>
-          <a:noFill/>
-          <a:ln/>
-        </p:spPr>
-        <p:txBody>
-          <a:bodyPr wrap="square" lIns="0" tIns="0" rIns="0" bIns="0" rtlCol="0" anchor="b"/>
-          <a:lstStyle/>
-          <a:p>
-            <a:pPr marL="0" indent="0">
-              <a:buNone/>
-            </a:pPr>
-            <a:r>
-              <a:rPr lang="en-US" sz="3200" b="1" dirty="0">
-                <a:solidFill>
-                  <a:schemeClr val="tx2"/>
-                </a:solidFill>
-              </a:rPr>
-              <a:t>1 + hours waited</a:t>
-            </a:r>
-            <a:endParaRPr lang="en-US" sz="3200" dirty="0"/>
-          </a:p>
-        </p:txBody>
-      </p:sp>
-      <p:sp>
-        <p:nvSpPr>
-          <p:cNvPr id="7" name="20 label"/>
-          <p:cNvSpPr txBox="1"/>
-          <p:nvPr/>
-        </p:nvSpPr>
-        <p:spPr>
-          <a:xfrm>
-            <a:off x="5577840" y="2807208"/>
-            <a:ext cx="3108960" cy="566928"/>
-          </a:xfrm>
-          <a:prstGeom prst="rect">
-            <a:avLst/>
-          </a:prstGeom>
-          <a:noFill/>
-          <a:ln/>
-        </p:spPr>
-        <p:txBody>
-          <a:bodyPr wrap="square" lIns="0" tIns="0" rIns="0" bIns="0" rtlCol="0" anchor="t"/>
-          <a:lstStyle/>
-          <a:p>
-            <a:pPr marL="0" indent="0">
-              <a:buNone/>
-            </a:pPr>
-            <a:r>
-              <a:rPr lang="en-US" sz="1400" dirty="0">
-                <a:solidFill>
-                  <a:schemeClr val="tx1"/>
-                </a:solidFill>
-              </a:rPr>
-              <a:t>what each call counts in a backlog, so the oldest call isn't starved</a:t>
-            </a:r>
-            <a:endParaRPr lang="en-US" sz="1400" dirty="0"/>
-          </a:p>
-        </p:txBody>
-      </p:sp>
-      <p:sp>
-        <p:nvSpPr>
-          <p:cNvPr id="8" name="20 value"/>
-          <p:cNvSpPr txBox="1"/>
-          <p:nvPr/>
-        </p:nvSpPr>
-        <p:spPr>
-          <a:xfrm>
-            <a:off x="5577840" y="3429000"/>
-            <a:ext cx="3108960" cy="502920"/>
-          </a:xfrm>
-          <a:prstGeom prst="rect">
-            <a:avLst/>
-          </a:prstGeom>
-          <a:noFill/>
-          <a:ln/>
-        </p:spPr>
-        <p:txBody>
-          <a:bodyPr wrap="square" lIns="0" tIns="0" rIns="0" bIns="0" rtlCol="0" anchor="b"/>
-          <a:lstStyle/>
-          <a:p>
-            <a:pPr marL="0" indent="0">
-              <a:buNone/>
-            </a:pPr>
-            <a:r>
-              <a:rPr lang="en-US" sz="3200" b="1" dirty="0">
-                <a:solidFill>
-                  <a:schemeClr val="tx2"/>
-                </a:solidFill>
-              </a:rPr>
-              <a:t>14 better, 0 worse</a:t>
-            </a:r>
-            <a:endParaRPr lang="en-US" sz="3200" dirty="0"/>
-          </a:p>
-        </p:txBody>
-      </p:sp>
-      <p:sp>
-        <p:nvSpPr>
-          <p:cNvPr id="9" name="20 label"/>
-          <p:cNvSpPr txBox="1"/>
-          <p:nvPr/>
-        </p:nvSpPr>
-        <p:spPr>
-          <a:xfrm>
-            <a:off x="5577840" y="3995928"/>
-            <a:ext cx="3108960" cy="566928"/>
-          </a:xfrm>
-          <a:prstGeom prst="rect">
-            <a:avLst/>
-          </a:prstGeom>
-          <a:noFill/>
-          <a:ln/>
-        </p:spPr>
-        <p:txBody>
-          <a:bodyPr wrap="square" lIns="0" tIns="0" rIns="0" bIns="0" rtlCol="0" anchor="t"/>
-          <a:lstStyle/>
-          <a:p>
-            <a:pPr marL="0" indent="0">
-              <a:buNone/>
-            </a:pPr>
-            <a:r>
-              <a:rPr lang="en-US" sz="1400" dirty="0">
-                <a:solidFill>
-                  <a:schemeClr val="tx1"/>
-                </a:solidFill>
-              </a:rPr>
-              <a:t>of 200 simulated rush-hour days (−4.6% delay)</a:t>
-            </a:r>
-            <a:endParaRPr lang="en-US" sz="1400" dirty="0"/>
-          </a:p>
-        </p:txBody>
-      </p:sp>
-      <p:sp>
-        <p:nvSpPr>
-          <p:cNvPr id="25" name="Slide Number Placeholder 0"/>
-          <p:cNvSpPr>
-            <a:spLocks noGrp="1"/>
-          </p:cNvSpPr>
-          <p:nvPr>
-            <p:ph type="sldNum" sz="quarter" idx="4294967295"/>
-          </p:nvPr>
-        </p:nvSpPr>
-        <p:spPr>
-          <a:xfrm>
-            <a:off x="8138160" y="4754880"/>
-            <a:ext cx="548640" cy="228600"/>
-          </a:xfrm>
-          <a:prstGeom prst="rect">
-            <a:avLst/>
-          </a:prstGeom>
-          <a:extLst>
-            <a:ext uri="{C572A759-6A51-4108-AA02-DFA0A04FC94B}">
-              <ma14:wrappingTextBoxFlag xmlns="" xmlns:ma14="http://schemas.microsoft.com/office/mac/drawingml/2011/main" val="0"/>
-            </a:ext>
-          </a:extLst>
-        </p:spPr>
-        <p:txBody>
-          <a:bodyPr lIns="0" tIns="0" rIns="0" bIns="0"/>
-          <a:lstStyle>
-            <a:lvl1pPr>
-              <a:defRPr sz="1000">
-                <a:solidFill>
-                  <a:schemeClr val="accent6"/>
-                </a:solidFill>
-              </a:defRPr>
-            </a:lvl1pPr>
-          </a:lstStyle>
-          <a:p>
-            <a:pPr algn="r"/>
-            <a:fld id="{F7021451-1387-4CA6-816F-3879F97B5CBC}" type="slidenum">
-              <a:rPr lang="en-US" b="0"/>
-              <a:t>8</a:t>
-            </a:fld>
-            <a:endParaRPr lang="en-US"/>
-          </a:p>
-        </p:txBody>
-      </p:sp>
-    </p:spTree>
-  </p:cSld>
-  <p:clrMapOvr>
-    <a:masterClrMapping/>
-  </p:clrMapOvr>
-</p:sld>
-</file>
-
-<file path=ppt/slides/slide9.xml><?xml version="1.0" encoding="utf-8"?>
-<p:sld xmlns:a="http://schemas.openxmlformats.org/drawingml/2006/main" xmlns:r="http://schemas.openxmlformats.org/officeDocument/2006/relationships" xmlns:p="http://schemas.openxmlformats.org/presentationml/2006/main">
   <p:cSld name="Slide 9">
     <p:spTree>
       <p:nvGrpSpPr>
@@ -24047,6 +22995,384 @@
                 </a:solidFill>
               </a:rPr>
               <a:t>of those days where greedy was not optimal</a:t>
+            </a:r>
+            <a:endParaRPr lang="en-US" sz="1400" dirty="0"/>
+          </a:p>
+        </p:txBody>
+      </p:sp>
+      <p:sp>
+        <p:nvSpPr>
+          <p:cNvPr id="25" name="Slide Number Placeholder 0"/>
+          <p:cNvSpPr>
+            <a:spLocks noGrp="1"/>
+          </p:cNvSpPr>
+          <p:nvPr>
+            <p:ph type="sldNum" sz="quarter" idx="4294967295"/>
+          </p:nvPr>
+        </p:nvSpPr>
+        <p:spPr>
+          <a:xfrm>
+            <a:off x="8138160" y="4754880"/>
+            <a:ext cx="548640" cy="228600"/>
+          </a:xfrm>
+          <a:prstGeom prst="rect">
+            <a:avLst/>
+          </a:prstGeom>
+          <a:extLst>
+            <a:ext uri="{C572A759-6A51-4108-AA02-DFA0A04FC94B}">
+              <ma14:wrappingTextBoxFlag xmlns="" xmlns:ma14="http://schemas.microsoft.com/office/mac/drawingml/2011/main" val="0"/>
+            </a:ext>
+          </a:extLst>
+        </p:spPr>
+        <p:txBody>
+          <a:bodyPr lIns="0" tIns="0" rIns="0" bIns="0"/>
+          <a:lstStyle>
+            <a:lvl1pPr>
+              <a:defRPr sz="1000">
+                <a:solidFill>
+                  <a:schemeClr val="accent6"/>
+                </a:solidFill>
+              </a:defRPr>
+            </a:lvl1pPr>
+          </a:lstStyle>
+          <a:p>
+            <a:pPr algn="r"/>
+            <a:fld id="{F7021451-1387-4CA6-816F-3879F97B5CBC}" type="slidenum">
+              <a:rPr lang="en-US" b="0"/>
+              <a:t>8</a:t>
+            </a:fld>
+            <a:endParaRPr lang="en-US"/>
+          </a:p>
+        </p:txBody>
+      </p:sp>
+    </p:spTree>
+  </p:cSld>
+  <p:clrMapOvr>
+    <a:masterClrMapping/>
+  </p:clrMapOvr>
+</p:sld>
+</file>
+
+<file path=ppt/slides/slide9.xml><?xml version="1.0" encoding="utf-8"?>
+<p:sld xmlns:a="http://schemas.openxmlformats.org/drawingml/2006/main" xmlns:r="http://schemas.openxmlformats.org/officeDocument/2006/relationships" xmlns:p="http://schemas.openxmlformats.org/presentationml/2006/main">
+  <p:cSld name="Slide 10">
+    <p:spTree>
+      <p:nvGrpSpPr>
+        <p:cNvPr id="1" name=""/>
+        <p:cNvGrpSpPr/>
+        <p:nvPr/>
+      </p:nvGrpSpPr>
+      <p:grpSpPr>
+        <a:xfrm>
+          <a:off x="0" y="0"/>
+          <a:ext cx="0" cy="0"/>
+          <a:chOff x="0" y="0"/>
+          <a:chExt cx="0" cy="0"/>
+        </a:xfrm>
+      </p:grpSpPr>
+      <p:sp>
+        <p:nvSpPr>
+          <p:cNvPr id="2" name="Text 0"/>
+          <p:cNvSpPr>
+            <a:spLocks noGrp="1"/>
+          </p:cNvSpPr>
+          <p:nvPr>
+            <p:ph type="title" idx="100" hasCustomPrompt="1"/>
+          </p:nvPr>
+        </p:nvSpPr>
+        <p:spPr>
+          <a:xfrm>
+            <a:off x="457200" y="274320"/>
+            <a:ext cx="8229600" cy="640080"/>
+          </a:xfrm>
+          <a:prstGeom prst="rect">
+            <a:avLst/>
+          </a:prstGeom>
+          <a:noFill/>
+          <a:ln/>
+        </p:spPr>
+        <p:txBody>
+          <a:bodyPr wrap="square" lIns="0" tIns="0" rIns="0" bIns="0" rtlCol="0" anchor="ctr"/>
+          <a:lstStyle/>
+          <a:p>
+            <a:pPr marL="0" indent="0" algn="l">
+              <a:buNone/>
+            </a:pPr>
+            <a:r>
+              <a:rPr lang="en-US" sz="3600" b="1" dirty="0">
+                <a:solidFill>
+                  <a:schemeClr val="tx2"/>
+                </a:solidFill>
+              </a:rPr>
+              <a:t>1,980 simulated days</a:t>
+            </a:r>
+            <a:endParaRPr lang="en-US" sz="3600" dirty="0"/>
+          </a:p>
+        </p:txBody>
+      </p:sp>
+      <p:graphicFrame>
+        <p:nvGraphicFramePr>
+          <p:cNvPr id="3" name="suites chart"/>
+          <p:cNvGraphicFramePr/>
+          <p:nvPr/>
+        </p:nvGraphicFramePr>
+        <p:xfrm>
+          <a:off x="457200" y="1051560"/>
+          <a:ext cx="5669280" cy="3337560"/>
+        </p:xfrm>
+        <a:graphic>
+          <a:graphicData uri="http://schemas.openxmlformats.org/drawingml/2006/chart">
+            <c:chart xmlns:c="http://schemas.openxmlformats.org/drawingml/2006/chart" xmlns:r="http://schemas.openxmlformats.org/officeDocument/2006/relationships" r:id="rId3"/>
+          </a:graphicData>
+        </a:graphic>
+      </p:graphicFrame>
+      <p:sp>
+        <p:nvSpPr>
+          <p:cNvPr id="4" name="Text 1"/>
+          <p:cNvSpPr txBox="1"/>
+          <p:nvPr/>
+        </p:nvSpPr>
+        <p:spPr>
+          <a:xfrm>
+            <a:off x="457200" y="4407408"/>
+            <a:ext cx="5669280" cy="274320"/>
+          </a:xfrm>
+          <a:prstGeom prst="rect">
+            <a:avLst/>
+          </a:prstGeom>
+          <a:noFill/>
+          <a:ln/>
+        </p:spPr>
+        <p:txBody>
+          <a:bodyPr wrap="square" lIns="0" tIns="0" rIns="0" bIns="0" rtlCol="0" anchor="t"/>
+          <a:lstStyle/>
+          <a:p>
+            <a:pPr marL="0" indent="0">
+              <a:buNone/>
+            </a:pPr>
+            <a:r>
+              <a:rPr lang="en-US" sz="1100" dirty="0">
+                <a:solidFill>
+                  <a:schemeClr val="accent6"/>
+                </a:solidFill>
+              </a:rPr>
+              <a:t>Days per suite: 1,200 · 400 · 200 · 120 · 60. Overloaded days average 132 calls for 8 vehicles.</a:t>
+            </a:r>
+            <a:endParaRPr lang="en-US" sz="1100" dirty="0"/>
+          </a:p>
+        </p:txBody>
+      </p:sp>
+      <p:sp>
+        <p:nvSpPr>
+          <p:cNvPr id="5" name="36 value"/>
+          <p:cNvSpPr txBox="1"/>
+          <p:nvPr/>
+        </p:nvSpPr>
+        <p:spPr>
+          <a:xfrm>
+            <a:off x="6400800" y="1188720"/>
+            <a:ext cx="2286000" cy="502920"/>
+          </a:xfrm>
+          <a:prstGeom prst="rect">
+            <a:avLst/>
+          </a:prstGeom>
+          <a:noFill/>
+          <a:ln/>
+        </p:spPr>
+        <p:txBody>
+          <a:bodyPr wrap="square" lIns="0" tIns="0" rIns="0" bIns="0" rtlCol="0" anchor="b"/>
+          <a:lstStyle/>
+          <a:p>
+            <a:pPr marL="0" indent="0">
+              <a:buNone/>
+            </a:pPr>
+            <a:r>
+              <a:rPr lang="en-US" sz="3200" b="1" dirty="0">
+                <a:solidFill>
+                  <a:schemeClr val="accent1"/>
+                </a:solidFill>
+              </a:rPr>
+              <a:t>−23.5%</a:t>
+            </a:r>
+            <a:endParaRPr lang="en-US" sz="3200" dirty="0"/>
+          </a:p>
+        </p:txBody>
+      </p:sp>
+      <p:sp>
+        <p:nvSpPr>
+          <p:cNvPr id="6" name="36 label"/>
+          <p:cNvSpPr txBox="1"/>
+          <p:nvPr/>
+        </p:nvSpPr>
+        <p:spPr>
+          <a:xfrm>
+            <a:off x="6400800" y="1755648"/>
+            <a:ext cx="2286000" cy="566928"/>
+          </a:xfrm>
+          <a:prstGeom prst="rect">
+            <a:avLst/>
+          </a:prstGeom>
+          <a:noFill/>
+          <a:ln/>
+        </p:spPr>
+        <p:txBody>
+          <a:bodyPr wrap="square" lIns="0" tIns="0" rIns="0" bIns="0" rtlCol="0" anchor="t"/>
+          <a:lstStyle/>
+          <a:p>
+            <a:pPr marL="0" indent="0">
+              <a:buNone/>
+            </a:pPr>
+            <a:r>
+              <a:rPr lang="en-US" sz="1400" dirty="0">
+                <a:solidFill>
+                  <a:schemeClr val="tx1"/>
+                </a:solidFill>
+              </a:rPr>
+              <a:t>average delay per call vs greedy: 22.6 → 17.3 min</a:t>
+            </a:r>
+            <a:endParaRPr lang="en-US" sz="1400" dirty="0"/>
+          </a:p>
+        </p:txBody>
+      </p:sp>
+      <p:sp>
+        <p:nvSpPr>
+          <p:cNvPr id="7" name="32 value"/>
+          <p:cNvSpPr txBox="1"/>
+          <p:nvPr/>
+        </p:nvSpPr>
+        <p:spPr>
+          <a:xfrm>
+            <a:off x="6400800" y="2423160"/>
+            <a:ext cx="2286000" cy="502920"/>
+          </a:xfrm>
+          <a:prstGeom prst="rect">
+            <a:avLst/>
+          </a:prstGeom>
+          <a:noFill/>
+          <a:ln/>
+        </p:spPr>
+        <p:txBody>
+          <a:bodyPr wrap="square" lIns="0" tIns="0" rIns="0" bIns="0" rtlCol="0" anchor="b"/>
+          <a:lstStyle/>
+          <a:p>
+            <a:pPr marL="0" indent="0">
+              <a:buNone/>
+            </a:pPr>
+            <a:r>
+              <a:rPr lang="en-US" sz="3200" b="1" dirty="0">
+                <a:solidFill>
+                  <a:schemeClr val="tx2"/>
+                </a:solidFill>
+              </a:rPr>
+              <a:t>1,709</a:t>
+            </a:r>
+            <a:endParaRPr lang="en-US" sz="3200" dirty="0"/>
+          </a:p>
+        </p:txBody>
+      </p:sp>
+      <p:sp>
+        <p:nvSpPr>
+          <p:cNvPr id="8" name="32 label"/>
+          <p:cNvSpPr txBox="1"/>
+          <p:nvPr/>
+        </p:nvSpPr>
+        <p:spPr>
+          <a:xfrm>
+            <a:off x="6400800" y="2990088"/>
+            <a:ext cx="2286000" cy="566928"/>
+          </a:xfrm>
+          <a:prstGeom prst="rect">
+            <a:avLst/>
+          </a:prstGeom>
+          <a:noFill/>
+          <a:ln/>
+        </p:spPr>
+        <p:txBody>
+          <a:bodyPr wrap="square" lIns="0" tIns="0" rIns="0" bIns="0" rtlCol="0" anchor="t"/>
+          <a:lstStyle/>
+          <a:p>
+            <a:pPr marL="0" indent="0">
+              <a:buNone/>
+            </a:pPr>
+            <a:r>
+              <a:rPr lang="en-US" sz="1400" dirty="0">
+                <a:solidFill>
+                  <a:schemeClr val="tx1"/>
+                </a:solidFill>
+              </a:rPr>
+              <a:t>days better than greedy; 142 worse, the rest tied</a:t>
+            </a:r>
+            <a:endParaRPr lang="en-US" sz="1400" dirty="0"/>
+          </a:p>
+        </p:txBody>
+      </p:sp>
+      <p:sp>
+        <p:nvSpPr>
+          <p:cNvPr id="9" name="24 value"/>
+          <p:cNvSpPr txBox="1"/>
+          <p:nvPr/>
+        </p:nvSpPr>
+        <p:spPr>
+          <a:xfrm>
+            <a:off x="6400800" y="3657600"/>
+            <a:ext cx="2286000" cy="502920"/>
+          </a:xfrm>
+          <a:prstGeom prst="rect">
+            <a:avLst/>
+          </a:prstGeom>
+          <a:noFill/>
+          <a:ln/>
+        </p:spPr>
+        <p:txBody>
+          <a:bodyPr wrap="square" lIns="0" tIns="0" rIns="0" bIns="0" rtlCol="0" anchor="b"/>
+          <a:lstStyle/>
+          <a:p>
+            <a:pPr marL="0" indent="0">
+              <a:buNone/>
+            </a:pPr>
+            <a:r>
+              <a:rPr lang="en-US" sz="3200" b="1" dirty="0">
+                <a:solidFill>
+                  <a:schemeClr val="tx2"/>
+                </a:solidFill>
+              </a:rPr>
+              <a:t>−8.2%</a:t>
+            </a:r>
+            <a:endParaRPr lang="en-US" sz="3200" dirty="0"/>
+          </a:p>
+        </p:txBody>
+      </p:sp>
+      <p:sp>
+        <p:nvSpPr>
+          <p:cNvPr id="10" name="24 label"/>
+          <p:cNvSpPr txBox="1"/>
+          <p:nvPr/>
+        </p:nvSpPr>
+        <p:spPr>
+          <a:xfrm>
+            <a:off x="6400800" y="4224528"/>
+            <a:ext cx="2286000" cy="566928"/>
+          </a:xfrm>
+          <a:prstGeom prst="rect">
+            <a:avLst/>
+          </a:prstGeom>
+          <a:noFill/>
+          <a:ln/>
+        </p:spPr>
+        <p:txBody>
+          <a:bodyPr wrap="square" lIns="0" tIns="0" rIns="0" bIns="0" rtlCol="0" anchor="t"/>
+          <a:lstStyle/>
+          <a:p>
+            <a:pPr marL="0" indent="0">
+              <a:buNone/>
+            </a:pPr>
+            <a:r>
+              <a:rPr lang="en-US" sz="1400" dirty="0">
+                <a:solidFill>
+                  <a:schemeClr val="tx1"/>
+                </a:solidFill>
+              </a:rPr>
+              <a:t>from re-planning alone, with the same return-to-base rule</a:t>
             </a:r>
             <a:endParaRPr lang="en-US" sz="1400" dirty="0"/>
           </a:p>

--- a/uvec-dispatch.pptx
+++ b/uvec-dispatch.pptx
@@ -724,7 +724,7 @@
                 </a:solidFill>
                 <a:latin typeface="+mn-lt"/>
               </a:rPr>
-              <a:t>Total delay vs the hindsight optimum</a:t>
+              <a:t>Total delay vs CP-SAT's optimum (return-to-base rules)</a:t>
             </a:r>
           </a:p>
         </c:rich>
@@ -1706,7 +1706,7 @@
           <a:p>
             <a:r>
               <a:rPr lang="en-US" dirty="0"/>
-              <a:t>~0:50. How much is left on the table? On 230 sampled days we compared with CP-SAT's optimum, under its rules: return to base. Greedy is 4 to 19% above it. Our dispatcher under the same rules is 0.6 to 2.1% above, without seeing the future. With standby it's 7 to 19% below that optimum, because parking near demand is worth more than perfect foresight. And if we told our dispatcher the city's true call pattern, it would gain only about 6% more (3 to 9% by suite), so demand estimation is close to its ceiling. If asked: on hindsight_check.py's tiny random days (1 to 25 calls) the per-day average gap is about 4%, because a few minutes on a 30-minute day is a big percentage.</a:t>
+              <a:t>~0:50. How much is left on the table? On 230 sampled days we compared with CP-SAT's optimum, under its rules: return to base. Greedy is 4 to 19% above it. Our dispatcher under the same rules is 0.6 to 2.1% above, without seeing the future. With standby it's 7 to 19% below that number, but that is not beating the optimum: CP-SAT's model must send every idle vehicle home, and standby is a rule it isn't given. The fair comparison is the first number; the second says parking near demand is worth more than perfect foresight. And if we told our dispatcher the city's true call pattern, it would gain only about 6% more (3 to 9% by suite), so demand estimation is close to its ceiling. If asked: on hindsight_check.py's tiny random days (1 to 25 calls) the per-day average gap is about 4%, because a few minutes on a 30-minute day is a big percentage.</a:t>
             </a:r>
           </a:p>
         </p:txBody>
@@ -2576,7 +2576,7 @@
           <a:p>
             <a:r>
               <a:rPr lang="en-US" dirty="0"/>
-              <a:t>~0:45. Where should an idle vehicle wait? We put vehicles at the k-median of the calls seen so far: the spots that minimise the drive to past calls, with base counted as three calls so a single early call doesn't drag a vehicle across town. A vehicle only moves if that improves average coverage by at least a minute, which avoids driving around for nothing. On this sample day the average drive to a call drops from about 20 minutes to about 10. Across our 1,980 simulated days, standby beat return-to-base on 1,600 and lost on 215.</a:t>
+              <a:t>~0:45. Where should an idle vehicle wait? We put vehicles at the k-median of the calls seen so far, Hakimi's 1964 graph median problem: the spots that minimise the drive to past calls, with base counted as three calls so a single early call doesn't drag a vehicle across town. A vehicle only moves if that improves average coverage by at least a minute, which avoids driving around for nothing. On this sample day the average drive to a call drops from about 20 minutes to about 10. Across our 1,980 simulated days, standby beat return-to-base on 1,600 and lost on 215.</a:t>
             </a:r>
           </a:p>
         </p:txBody>
@@ -3058,7 +3058,7 @@
           </a:prstGeom>
           <a:extLst>
             <a:ext uri="{C572A759-6A51-4108-AA02-DFA0A04FC94B}">
-              <ma14:wrappingTextBoxFlag xmlns="" xmlns:ma14="http://schemas.microsoft.com/office/mac/drawingml/2011/main" val="0"/>
+              <ma14:wrappingTextBoxFlag xmlns:ma14="http://schemas.microsoft.com/office/mac/drawingml/2011/main" xmlns="" val="0"/>
             </a:ext>
           </a:extLst>
         </p:spPr>
@@ -3213,7 +3213,7 @@
           </a:prstGeom>
           <a:extLst>
             <a:ext uri="{C572A759-6A51-4108-AA02-DFA0A04FC94B}">
-              <ma14:wrappingTextBoxFlag xmlns="" xmlns:ma14="http://schemas.microsoft.com/office/mac/drawingml/2011/main" val="0"/>
+              <ma14:wrappingTextBoxFlag xmlns:ma14="http://schemas.microsoft.com/office/mac/drawingml/2011/main" xmlns="" val="0"/>
             </a:ext>
           </a:extLst>
         </p:spPr>
@@ -3288,7 +3288,7 @@
           </a:prstGeom>
           <a:extLst>
             <a:ext uri="{C572A759-6A51-4108-AA02-DFA0A04FC94B}">
-              <ma14:wrappingTextBoxFlag xmlns="" xmlns:ma14="http://schemas.microsoft.com/office/mac/drawingml/2011/main" val="0"/>
+              <ma14:wrappingTextBoxFlag xmlns:ma14="http://schemas.microsoft.com/office/mac/drawingml/2011/main" xmlns="" val="0"/>
             </a:ext>
           </a:extLst>
         </p:spPr>
@@ -4956,7 +4956,7 @@
                   <a:schemeClr val="accent6"/>
                 </a:solidFill>
               </a:rPr>
-              <a:t>Return-to-base rules; optimum proven on 164 of 230 days.</a:t>
+              <a:t>0% = CP-SAT's hindsight optimum under return-to-base rules, proven on 164 of 230 days.</a:t>
             </a:r>
             <a:endParaRPr lang="en-US" sz="1100" dirty="0"/>
           </a:p>
@@ -4970,8 +4970,8 @@
         </p:nvSpPr>
         <p:spPr>
           <a:xfrm>
-            <a:off x="5897880" y="1188720"/>
-            <a:ext cx="2788920" cy="502920"/>
+            <a:off x="5897880" y="1179576"/>
+            <a:ext cx="2788920" cy="411480"/>
           </a:xfrm>
           <a:prstGeom prst="rect">
             <a:avLst/>
@@ -4987,14 +4987,14 @@
               <a:buNone/>
             </a:pPr>
             <a:r>
-              <a:rPr lang="en-US" sz="3200" b="1" dirty="0">
+              <a:rPr lang="en-US" sz="2800" b="1" dirty="0">
                 <a:solidFill>
                   <a:schemeClr val="accent1"/>
                 </a:solidFill>
               </a:rPr>
               <a:t>+0.6 to 2.1%</a:t>
             </a:r>
-            <a:endParaRPr lang="en-US" sz="3200" dirty="0"/>
+            <a:endParaRPr lang="en-US" sz="2800" dirty="0"/>
           </a:p>
         </p:txBody>
       </p:sp>
@@ -5006,8 +5006,8 @@
         </p:nvSpPr>
         <p:spPr>
           <a:xfrm>
-            <a:off x="5897880" y="1755648"/>
-            <a:ext cx="2788920" cy="566928"/>
+            <a:off x="5897880" y="1618488"/>
+            <a:ext cx="2788920" cy="429768"/>
           </a:xfrm>
           <a:prstGeom prst="rect">
             <a:avLst/>
@@ -5028,7 +5028,7 @@
                   <a:schemeClr val="tx1"/>
                 </a:solidFill>
               </a:rPr>
-              <a:t>above the optimum under its rules, without seeing the future</a:t>
+              <a:t>above its proven optimum, without seeing the future</a:t>
             </a:r>
             <a:endParaRPr lang="en-US" sz="1400" dirty="0"/>
           </a:p>
@@ -5042,8 +5042,8 @@
         </p:nvSpPr>
         <p:spPr>
           <a:xfrm>
-            <a:off x="5897880" y="2423160"/>
-            <a:ext cx="2788920" cy="502920"/>
+            <a:off x="5897880" y="2295144"/>
+            <a:ext cx="2788920" cy="411480"/>
           </a:xfrm>
           <a:prstGeom prst="rect">
             <a:avLst/>
@@ -5059,14 +5059,14 @@
               <a:buNone/>
             </a:pPr>
             <a:r>
-              <a:rPr lang="en-US" sz="3200" b="1" dirty="0">
+              <a:rPr lang="en-US" sz="2800" b="1" dirty="0">
                 <a:solidFill>
                   <a:schemeClr val="accent1"/>
                 </a:solidFill>
               </a:rPr>
               <a:t>7 to 19% below</a:t>
             </a:r>
-            <a:endParaRPr lang="en-US" sz="3200" dirty="0"/>
+            <a:endParaRPr lang="en-US" sz="2800" dirty="0"/>
           </a:p>
         </p:txBody>
       </p:sp>
@@ -5078,8 +5078,8 @@
         </p:nvSpPr>
         <p:spPr>
           <a:xfrm>
-            <a:off x="5897880" y="2990088"/>
-            <a:ext cx="2788920" cy="566928"/>
+            <a:off x="5897880" y="2734056"/>
+            <a:ext cx="2788920" cy="429768"/>
           </a:xfrm>
           <a:prstGeom prst="rect">
             <a:avLst/>
@@ -5100,7 +5100,7 @@
                   <a:schemeClr val="tx1"/>
                 </a:solidFill>
               </a:rPr>
-              <a:t>with standby: waiting near demand beats foresight plus going home</a:t>
+              <a:t>CP-SAT, which must go home: a looser rule, not a beaten optimum</a:t>
             </a:r>
             <a:endParaRPr lang="en-US" sz="1400" dirty="0"/>
           </a:p>
@@ -5114,8 +5114,8 @@
         </p:nvSpPr>
         <p:spPr>
           <a:xfrm>
-            <a:off x="5897880" y="3657600"/>
-            <a:ext cx="2788920" cy="502920"/>
+            <a:off x="5897880" y="3410712"/>
+            <a:ext cx="2788920" cy="411480"/>
           </a:xfrm>
           <a:prstGeom prst="rect">
             <a:avLst/>
@@ -5131,14 +5131,14 @@
               <a:buNone/>
             </a:pPr>
             <a:r>
-              <a:rPr lang="en-US" sz="3200" b="1" dirty="0">
+              <a:rPr lang="en-US" sz="2800" b="1" dirty="0">
                 <a:solidFill>
                   <a:schemeClr val="tx2"/>
                 </a:solidFill>
               </a:rPr>
               <a:t>~6% more</a:t>
             </a:r>
-            <a:endParaRPr lang="en-US" sz="3200" dirty="0"/>
+            <a:endParaRPr lang="en-US" sz="2800" dirty="0"/>
           </a:p>
         </p:txBody>
       </p:sp>
@@ -5150,8 +5150,8 @@
         </p:nvSpPr>
         <p:spPr>
           <a:xfrm>
-            <a:off x="5897880" y="4224528"/>
-            <a:ext cx="2788920" cy="566928"/>
+            <a:off x="5897880" y="3849624"/>
+            <a:ext cx="2788920" cy="429768"/>
           </a:xfrm>
           <a:prstGeom prst="rect">
             <a:avLst/>
@@ -5180,6 +5180,114 @@
       </p:sp>
       <p:sp>
         <p:nvSpPr>
+          <p:cNvPr id="11" name="rule tag 1"/>
+          <p:cNvSpPr txBox="1"/>
+          <p:nvPr/>
+        </p:nvSpPr>
+        <p:spPr>
+          <a:xfrm>
+            <a:off x="5897880" y="1005840"/>
+            <a:ext cx="2788920" cy="155448"/>
+          </a:xfrm>
+          <a:prstGeom prst="rect">
+            <a:avLst/>
+          </a:prstGeom>
+          <a:noFill/>
+          <a:ln/>
+        </p:spPr>
+        <p:txBody>
+          <a:bodyPr wrap="square" lIns="0" tIns="0" rIns="0" bIns="0" rtlCol="0" anchor="t"/>
+          <a:lstStyle/>
+          <a:p>
+            <a:pPr marL="0" indent="0">
+              <a:buNone/>
+            </a:pPr>
+            <a:r>
+              <a:rPr lang="en-US" sz="1000" b="1" dirty="0">
+                <a:solidFill>
+                  <a:schemeClr val="accent6"/>
+                </a:solidFill>
+              </a:rPr>
+              <a:t>SAME RULES AS CP-SAT: RETURN TO BASE</a:t>
+            </a:r>
+            <a:endParaRPr lang="en-US" sz="1000" dirty="0"/>
+          </a:p>
+        </p:txBody>
+      </p:sp>
+      <p:sp>
+        <p:nvSpPr>
+          <p:cNvPr id="12" name="rule tag 2"/>
+          <p:cNvSpPr txBox="1"/>
+          <p:nvPr/>
+        </p:nvSpPr>
+        <p:spPr>
+          <a:xfrm>
+            <a:off x="5897880" y="2121408"/>
+            <a:ext cx="2788920" cy="155448"/>
+          </a:xfrm>
+          <a:prstGeom prst="rect">
+            <a:avLst/>
+          </a:prstGeom>
+          <a:noFill/>
+          <a:ln/>
+        </p:spPr>
+        <p:txBody>
+          <a:bodyPr wrap="square" lIns="0" tIns="0" rIns="0" bIns="0" rtlCol="0" anchor="t"/>
+          <a:lstStyle/>
+          <a:p>
+            <a:pPr marL="0" indent="0">
+              <a:buNone/>
+            </a:pPr>
+            <a:r>
+              <a:rPr lang="en-US" sz="1000" b="1" dirty="0">
+                <a:solidFill>
+                  <a:schemeClr val="accent6"/>
+                </a:solidFill>
+              </a:rPr>
+              <a:t>OUR RULES: PARK NEAR DEMAND (STANDBY)</a:t>
+            </a:r>
+            <a:endParaRPr lang="en-US" sz="1000" dirty="0"/>
+          </a:p>
+        </p:txBody>
+      </p:sp>
+      <p:sp>
+        <p:nvSpPr>
+          <p:cNvPr id="13" name="rule tag 3"/>
+          <p:cNvSpPr txBox="1"/>
+          <p:nvPr/>
+        </p:nvSpPr>
+        <p:spPr>
+          <a:xfrm>
+            <a:off x="5897880" y="3236976"/>
+            <a:ext cx="2788920" cy="155448"/>
+          </a:xfrm>
+          <a:prstGeom prst="rect">
+            <a:avLst/>
+          </a:prstGeom>
+          <a:noFill/>
+          <a:ln/>
+        </p:spPr>
+        <p:txBody>
+          <a:bodyPr wrap="square" lIns="0" tIns="0" rIns="0" bIns="0" rtlCol="0" anchor="t"/>
+          <a:lstStyle/>
+          <a:p>
+            <a:pPr marL="0" indent="0">
+              <a:buNone/>
+            </a:pPr>
+            <a:r>
+              <a:rPr lang="en-US" sz="1000" b="1" dirty="0">
+                <a:solidFill>
+                  <a:schemeClr val="accent6"/>
+                </a:solidFill>
+              </a:rPr>
+              <a:t>DEMAND ESTIMATE</a:t>
+            </a:r>
+            <a:endParaRPr lang="en-US" sz="1000" dirty="0"/>
+          </a:p>
+        </p:txBody>
+      </p:sp>
+      <p:sp>
+        <p:nvSpPr>
           <p:cNvPr id="25" name="Slide Number Placeholder 0"/>
           <p:cNvSpPr>
             <a:spLocks noGrp="1"/>
@@ -5198,7 +5306,7 @@
           </a:prstGeom>
           <a:extLst>
             <a:ext uri="{C572A759-6A51-4108-AA02-DFA0A04FC94B}">
-              <ma14:wrappingTextBoxFlag xmlns="" xmlns:ma14="http://schemas.microsoft.com/office/mac/drawingml/2011/main" val="0"/>
+              <ma14:wrappingTextBoxFlag xmlns:ma14="http://schemas.microsoft.com/office/mac/drawingml/2011/main" xmlns="" val="0"/>
             </a:ext>
           </a:extLst>
         </p:spPr>
@@ -5628,7 +5736,7 @@
           </a:prstGeom>
           <a:extLst>
             <a:ext uri="{C572A759-6A51-4108-AA02-DFA0A04FC94B}">
-              <ma14:wrappingTextBoxFlag xmlns="" xmlns:ma14="http://schemas.microsoft.com/office/mac/drawingml/2011/main" val="0"/>
+              <ma14:wrappingTextBoxFlag xmlns:ma14="http://schemas.microsoft.com/office/mac/drawingml/2011/main" xmlns="" val="0"/>
             </a:ext>
           </a:extLst>
         </p:spPr>
@@ -6412,7 +6520,7 @@
           </a:prstGeom>
           <a:extLst>
             <a:ext uri="{C572A759-6A51-4108-AA02-DFA0A04FC94B}">
-              <ma14:wrappingTextBoxFlag xmlns="" xmlns:ma14="http://schemas.microsoft.com/office/mac/drawingml/2011/main" val="0"/>
+              <ma14:wrappingTextBoxFlag xmlns:ma14="http://schemas.microsoft.com/office/mac/drawingml/2011/main" xmlns="" val="0"/>
             </a:ext>
           </a:extLst>
         </p:spPr>
@@ -7048,52 +7156,6 @@
             <a:pPr marL="0" indent="0">
               <a:buNone/>
             </a:pPr>
-            <a:r>
-              <a:rPr lang="en-US" sz="1600" b="1" dirty="0">
-                <a:solidFill>
-                  <a:schemeClr val="bg1"/>
-                </a:solidFill>
-              </a:rPr>
-              <a:t>Try it: </a:t>
-            </a:r>
-            <a:r>
-              <a:rPr lang="en-US" sz="1600" dirty="0">
-                <a:solidFill>
-                  <a:schemeClr val="bg1"/>
-                </a:solidFill>
-                <a:latin typeface="Courier New" pitchFamily="34" charset="0"/>
-                <a:ea typeface="Courier New" pitchFamily="34" charset="-122"/>
-                <a:cs typeface="Courier New" pitchFamily="34" charset="-120"/>
-              </a:rPr>
-              <a:t>python dispatcher.py input.txt</a:t>
-            </a:r>
-            <a:r>
-              <a:rPr lang="en-US" sz="1600" dirty="0">
-                <a:solidFill>
-                  <a:schemeClr val="bg1"/>
-                </a:solidFill>
-              </a:rPr>
-              <a:t>   ·   replay: </a:t>
-            </a:r>
-            <a:r>
-              <a:rPr lang="en-US" sz="1600" dirty="0">
-                <a:solidFill>
-                  <a:schemeClr val="bg1"/>
-                </a:solidFill>
-                <a:latin typeface="Courier New" pitchFamily="34" charset="0"/>
-                <a:ea typeface="Courier New" pitchFamily="34" charset="-122"/>
-                <a:cs typeface="Courier New" pitchFamily="34" charset="-120"/>
-              </a:rPr>
-              <a:t>apps/web</a:t>
-            </a:r>
-            <a:r>
-              <a:rPr lang="en-US" sz="1600" dirty="0">
-                <a:solidFill>
-                  <a:schemeClr val="bg1"/>
-                </a:solidFill>
-              </a:rPr>
-              <a:t>   ·   Questions?</a:t>
-            </a:r>
             <a:endParaRPr lang="en-US" sz="1600" dirty="0"/>
           </a:p>
         </p:txBody>
@@ -7118,7 +7180,7 @@
           </a:prstGeom>
           <a:extLst>
             <a:ext uri="{C572A759-6A51-4108-AA02-DFA0A04FC94B}">
-              <ma14:wrappingTextBoxFlag xmlns="" xmlns:ma14="http://schemas.microsoft.com/office/mac/drawingml/2011/main" val="0"/>
+              <ma14:wrappingTextBoxFlag xmlns:ma14="http://schemas.microsoft.com/office/mac/drawingml/2011/main" xmlns="" val="0"/>
             </a:ext>
           </a:extLst>
         </p:spPr>
@@ -10421,7 +10483,7 @@
           </a:prstGeom>
           <a:extLst>
             <a:ext uri="{C572A759-6A51-4108-AA02-DFA0A04FC94B}">
-              <ma14:wrappingTextBoxFlag xmlns="" xmlns:ma14="http://schemas.microsoft.com/office/mac/drawingml/2011/main" val="0"/>
+              <ma14:wrappingTextBoxFlag xmlns:ma14="http://schemas.microsoft.com/office/mac/drawingml/2011/main" xmlns="" val="0"/>
             </a:ext>
           </a:extLst>
         </p:spPr>
@@ -12917,7 +12979,7 @@
           </a:prstGeom>
           <a:extLst>
             <a:ext uri="{C572A759-6A51-4108-AA02-DFA0A04FC94B}">
-              <ma14:wrappingTextBoxFlag xmlns="" xmlns:ma14="http://schemas.microsoft.com/office/mac/drawingml/2011/main" val="0"/>
+              <ma14:wrappingTextBoxFlag xmlns:ma14="http://schemas.microsoft.com/office/mac/drawingml/2011/main" xmlns="" val="0"/>
             </a:ext>
           </a:extLst>
         </p:spPr>
@@ -13861,7 +13923,7 @@
           </a:prstGeom>
           <a:extLst>
             <a:ext uri="{C572A759-6A51-4108-AA02-DFA0A04FC94B}">
-              <ma14:wrappingTextBoxFlag xmlns="" xmlns:ma14="http://schemas.microsoft.com/office/mac/drawingml/2011/main" val="0"/>
+              <ma14:wrappingTextBoxFlag xmlns:ma14="http://schemas.microsoft.com/office/mac/drawingml/2011/main" xmlns="" val="0"/>
             </a:ext>
           </a:extLst>
         </p:spPr>
@@ -15480,7 +15542,7 @@
           </a:prstGeom>
           <a:extLst>
             <a:ext uri="{C572A759-6A51-4108-AA02-DFA0A04FC94B}">
-              <ma14:wrappingTextBoxFlag xmlns="" xmlns:ma14="http://schemas.microsoft.com/office/mac/drawingml/2011/main" val="0"/>
+              <ma14:wrappingTextBoxFlag xmlns:ma14="http://schemas.microsoft.com/office/mac/drawingml/2011/main" xmlns="" val="0"/>
             </a:ext>
           </a:extLst>
         </p:spPr>
@@ -17258,7 +17320,7 @@
           </a:prstGeom>
           <a:extLst>
             <a:ext uri="{C572A759-6A51-4108-AA02-DFA0A04FC94B}">
-              <ma14:wrappingTextBoxFlag xmlns="" xmlns:ma14="http://schemas.microsoft.com/office/mac/drawingml/2011/main" val="0"/>
+              <ma14:wrappingTextBoxFlag xmlns:ma14="http://schemas.microsoft.com/office/mac/drawingml/2011/main" xmlns="" val="0"/>
             </a:ext>
           </a:extLst>
         </p:spPr>
@@ -18610,7 +18672,7 @@
           </a:prstGeom>
           <a:extLst>
             <a:ext uri="{C572A759-6A51-4108-AA02-DFA0A04FC94B}">
-              <ma14:wrappingTextBoxFlag xmlns="" xmlns:ma14="http://schemas.microsoft.com/office/mac/drawingml/2011/main" val="0"/>
+              <ma14:wrappingTextBoxFlag xmlns:ma14="http://schemas.microsoft.com/office/mac/drawingml/2011/main" xmlns="" val="0"/>
             </a:ext>
           </a:extLst>
         </p:spPr>
@@ -22104,7 +22166,7 @@
                   <a:schemeClr val="tx1"/>
                 </a:solidFill>
               </a:rPr>
-              <a:t>Spots are the k-median of every call seen so far; base counts as 3 calls</a:t>
+              <a:t>Spots are the k-median (Hakimi, 1964) of every call seen so far; base counts as 3 calls</a:t>
             </a:r>
             <a:endParaRPr lang="en-US" sz="1400" dirty="0"/>
           </a:p>
@@ -22296,6 +22358,58 @@
       </p:sp>
       <p:sp>
         <p:nvSpPr>
+          <p:cNvPr id="120" name="Hakimi reference"/>
+          <p:cNvSpPr txBox="1"/>
+          <p:nvPr/>
+        </p:nvSpPr>
+        <p:spPr>
+          <a:xfrm>
+            <a:off x="458204" y="4592117"/>
+            <a:ext cx="7406640" cy="182880"/>
+          </a:xfrm>
+          <a:prstGeom prst="rect">
+            <a:avLst/>
+          </a:prstGeom>
+          <a:noFill/>
+          <a:ln/>
+        </p:spPr>
+        <p:txBody>
+          <a:bodyPr wrap="square" lIns="0" tIns="0" rIns="0" bIns="0" rtlCol="0" anchor="t"/>
+          <a:lstStyle/>
+          <a:p>
+            <a:pPr marL="0" indent="0">
+              <a:buNone/>
+            </a:pPr>
+            <a:r>
+              <a:rPr lang="en-US" sz="900" dirty="0">
+                <a:solidFill>
+                  <a:schemeClr val="accent6"/>
+                </a:solidFill>
+              </a:rPr>
+              <a:t>Hakimi, S. L. (1964). Optimum locations of switching centers and the absolute centers and medians of a graph. </a:t>
+            </a:r>
+            <a:r>
+              <a:rPr lang="en-US" sz="900" i="1" dirty="0">
+                <a:solidFill>
+                  <a:schemeClr val="accent6"/>
+                </a:solidFill>
+              </a:rPr>
+              <a:t>Operations Research, 12</a:t>
+            </a:r>
+            <a:r>
+              <a:rPr lang="en-US" sz="900" dirty="0">
+                <a:solidFill>
+                  <a:schemeClr val="accent6"/>
+                </a:solidFill>
+              </a:rPr>
+              <a:t>(3), 450–459.</a:t>
+            </a:r>
+            <a:endParaRPr lang="en-US" sz="900" dirty="0"/>
+          </a:p>
+        </p:txBody>
+      </p:sp>
+      <p:sp>
+        <p:nvSpPr>
           <p:cNvPr id="119" name="Slide Number Placeholder 0"/>
           <p:cNvSpPr>
             <a:spLocks noGrp="1"/>
@@ -22314,7 +22428,7 @@
           </a:prstGeom>
           <a:extLst>
             <a:ext uri="{C572A759-6A51-4108-AA02-DFA0A04FC94B}">
-              <ma14:wrappingTextBoxFlag xmlns="" xmlns:ma14="http://schemas.microsoft.com/office/mac/drawingml/2011/main" val="0"/>
+              <ma14:wrappingTextBoxFlag xmlns:ma14="http://schemas.microsoft.com/office/mac/drawingml/2011/main" xmlns="" val="0"/>
             </a:ext>
           </a:extLst>
         </p:spPr>
@@ -23020,7 +23134,7 @@
           </a:prstGeom>
           <a:extLst>
             <a:ext uri="{C572A759-6A51-4108-AA02-DFA0A04FC94B}">
-              <ma14:wrappingTextBoxFlag xmlns="" xmlns:ma14="http://schemas.microsoft.com/office/mac/drawingml/2011/main" val="0"/>
+              <ma14:wrappingTextBoxFlag xmlns:ma14="http://schemas.microsoft.com/office/mac/drawingml/2011/main" xmlns="" val="0"/>
             </a:ext>
           </a:extLst>
         </p:spPr>
@@ -23398,7 +23512,7 @@
           </a:prstGeom>
           <a:extLst>
             <a:ext uri="{C572A759-6A51-4108-AA02-DFA0A04FC94B}">
-              <ma14:wrappingTextBoxFlag xmlns="" xmlns:ma14="http://schemas.microsoft.com/office/mac/drawingml/2011/main" val="0"/>
+              <ma14:wrappingTextBoxFlag xmlns:ma14="http://schemas.microsoft.com/office/mac/drawingml/2011/main" xmlns="" val="0"/>
             </a:ext>
           </a:extLst>
         </p:spPr>
